--- a/Diapo_bigdata.pptx
+++ b/Diapo_bigdata.pptx
@@ -128,6 +128,4839 @@
 <c:chartSpace xmlns:c="http://schemas.openxmlformats.org/drawingml/2006/chart" xmlns:a="http://schemas.openxmlformats.org/drawingml/2006/main" xmlns:r="http://schemas.openxmlformats.org/officeDocument/2006/relationships" xmlns:c16r2="http://schemas.microsoft.com/office/drawing/2015/06/chart">
   <c:date1904 val="0"/>
   <c:lang val="fr-FR"/>
+  <c:roundedCorners val="0"/>
+  <mc:AlternateContent xmlns:mc="http://schemas.openxmlformats.org/markup-compatibility/2006">
+    <mc:Choice xmlns:c14="http://schemas.microsoft.com/office/drawing/2007/8/2/chart" Requires="c14">
+      <c14:style val="102"/>
+    </mc:Choice>
+    <mc:Fallback>
+      <c:style val="2"/>
+    </mc:Fallback>
+  </mc:AlternateContent>
+  <c:chart>
+    <c:title>
+      <c:tx>
+        <c:rich>
+          <a:bodyPr rot="0" spcFirstLastPara="1" vertOverflow="ellipsis" vert="horz" wrap="square" anchor="ctr" anchorCtr="1"/>
+          <a:lstStyle/>
+          <a:p>
+            <a:pPr>
+              <a:defRPr sz="1400" b="0" i="0" u="none" strike="noStrike" kern="1200" spc="0" baseline="0">
+                <a:solidFill>
+                  <a:schemeClr val="tx1">
+                    <a:lumMod val="65000"/>
+                    <a:lumOff val="35000"/>
+                  </a:schemeClr>
+                </a:solidFill>
+                <a:latin typeface="+mn-lt"/>
+                <a:ea typeface="+mn-ea"/>
+                <a:cs typeface="+mn-cs"/>
+              </a:defRPr>
+            </a:pPr>
+            <a:r>
+              <a:rPr lang="en-US" baseline="0"/>
+              <a:t>Adjusted close - Tesla </a:t>
+            </a:r>
+            <a:endParaRPr lang="en-US"/>
+          </a:p>
+        </c:rich>
+      </c:tx>
+      <c:overlay val="0"/>
+      <c:spPr>
+        <a:noFill/>
+        <a:ln>
+          <a:noFill/>
+        </a:ln>
+        <a:effectLst/>
+      </c:spPr>
+      <c:txPr>
+        <a:bodyPr rot="0" spcFirstLastPara="1" vertOverflow="ellipsis" vert="horz" wrap="square" anchor="ctr" anchorCtr="1"/>
+        <a:lstStyle/>
+        <a:p>
+          <a:pPr>
+            <a:defRPr sz="1400" b="0" i="0" u="none" strike="noStrike" kern="1200" spc="0" baseline="0">
+              <a:solidFill>
+                <a:schemeClr val="tx1">
+                  <a:lumMod val="65000"/>
+                  <a:lumOff val="35000"/>
+                </a:schemeClr>
+              </a:solidFill>
+              <a:latin typeface="+mn-lt"/>
+              <a:ea typeface="+mn-ea"/>
+              <a:cs typeface="+mn-cs"/>
+            </a:defRPr>
+          </a:pPr>
+          <a:endParaRPr lang="fr-FR"/>
+        </a:p>
+      </c:txPr>
+    </c:title>
+    <c:autoTitleDeleted val="0"/>
+    <c:plotArea>
+      <c:layout>
+        <c:manualLayout>
+          <c:layoutTarget val="inner"/>
+          <c:xMode val="edge"/>
+          <c:yMode val="edge"/>
+          <c:x val="9.1311190759173974E-2"/>
+          <c:y val="0.19486111111111112"/>
+          <c:w val="0.88203260412023965"/>
+          <c:h val="0.59360892388451447"/>
+        </c:manualLayout>
+      </c:layout>
+      <c:lineChart>
+        <c:grouping val="standard"/>
+        <c:varyColors val="0"/>
+        <c:ser>
+          <c:idx val="0"/>
+          <c:order val="0"/>
+          <c:tx>
+            <c:strRef>
+              <c:f>prices_sample!$F$1</c:f>
+              <c:strCache>
+                <c:ptCount val="1"/>
+                <c:pt idx="0">
+                  <c:v>adj close</c:v>
+                </c:pt>
+              </c:strCache>
+            </c:strRef>
+          </c:tx>
+          <c:spPr>
+            <a:ln w="28575" cap="rnd">
+              <a:solidFill>
+                <a:schemeClr val="accent1"/>
+              </a:solidFill>
+              <a:round/>
+            </a:ln>
+            <a:effectLst/>
+          </c:spPr>
+          <c:marker>
+            <c:symbol val="none"/>
+          </c:marker>
+          <c:cat>
+            <c:numRef>
+              <c:f>prices_sample!$A$2:$A$55406</c:f>
+              <c:numCache>
+                <c:formatCode>m/d/yyyy</c:formatCode>
+                <c:ptCount val="756"/>
+                <c:pt idx="0">
+                  <c:v>44196</c:v>
+                </c:pt>
+                <c:pt idx="1">
+                  <c:v>44195</c:v>
+                </c:pt>
+                <c:pt idx="2">
+                  <c:v>44194</c:v>
+                </c:pt>
+                <c:pt idx="3">
+                  <c:v>44193</c:v>
+                </c:pt>
+                <c:pt idx="4">
+                  <c:v>44189</c:v>
+                </c:pt>
+                <c:pt idx="5">
+                  <c:v>44188</c:v>
+                </c:pt>
+                <c:pt idx="6">
+                  <c:v>44187</c:v>
+                </c:pt>
+                <c:pt idx="7">
+                  <c:v>44186</c:v>
+                </c:pt>
+                <c:pt idx="8">
+                  <c:v>44183</c:v>
+                </c:pt>
+                <c:pt idx="9">
+                  <c:v>44182</c:v>
+                </c:pt>
+                <c:pt idx="10">
+                  <c:v>44181</c:v>
+                </c:pt>
+                <c:pt idx="11">
+                  <c:v>44180</c:v>
+                </c:pt>
+                <c:pt idx="12">
+                  <c:v>44179</c:v>
+                </c:pt>
+                <c:pt idx="13">
+                  <c:v>44176</c:v>
+                </c:pt>
+                <c:pt idx="14">
+                  <c:v>44175</c:v>
+                </c:pt>
+                <c:pt idx="15">
+                  <c:v>44174</c:v>
+                </c:pt>
+                <c:pt idx="16">
+                  <c:v>44173</c:v>
+                </c:pt>
+                <c:pt idx="17">
+                  <c:v>44172</c:v>
+                </c:pt>
+                <c:pt idx="18">
+                  <c:v>44169</c:v>
+                </c:pt>
+                <c:pt idx="19">
+                  <c:v>44168</c:v>
+                </c:pt>
+                <c:pt idx="20">
+                  <c:v>44167</c:v>
+                </c:pt>
+                <c:pt idx="21">
+                  <c:v>44166</c:v>
+                </c:pt>
+                <c:pt idx="22">
+                  <c:v>44165</c:v>
+                </c:pt>
+                <c:pt idx="23">
+                  <c:v>44162</c:v>
+                </c:pt>
+                <c:pt idx="24">
+                  <c:v>44160</c:v>
+                </c:pt>
+                <c:pt idx="25">
+                  <c:v>44159</c:v>
+                </c:pt>
+                <c:pt idx="26">
+                  <c:v>44158</c:v>
+                </c:pt>
+                <c:pt idx="27">
+                  <c:v>44155</c:v>
+                </c:pt>
+                <c:pt idx="28">
+                  <c:v>44154</c:v>
+                </c:pt>
+                <c:pt idx="29">
+                  <c:v>44153</c:v>
+                </c:pt>
+                <c:pt idx="30">
+                  <c:v>44152</c:v>
+                </c:pt>
+                <c:pt idx="31">
+                  <c:v>44151</c:v>
+                </c:pt>
+                <c:pt idx="32">
+                  <c:v>44148</c:v>
+                </c:pt>
+                <c:pt idx="33">
+                  <c:v>44147</c:v>
+                </c:pt>
+                <c:pt idx="34">
+                  <c:v>44146</c:v>
+                </c:pt>
+                <c:pt idx="35">
+                  <c:v>44145</c:v>
+                </c:pt>
+                <c:pt idx="36">
+                  <c:v>44144</c:v>
+                </c:pt>
+                <c:pt idx="37">
+                  <c:v>44141</c:v>
+                </c:pt>
+                <c:pt idx="38">
+                  <c:v>44140</c:v>
+                </c:pt>
+                <c:pt idx="39">
+                  <c:v>44139</c:v>
+                </c:pt>
+                <c:pt idx="40">
+                  <c:v>44138</c:v>
+                </c:pt>
+                <c:pt idx="41">
+                  <c:v>44137</c:v>
+                </c:pt>
+                <c:pt idx="42">
+                  <c:v>44134</c:v>
+                </c:pt>
+                <c:pt idx="43">
+                  <c:v>44133</c:v>
+                </c:pt>
+                <c:pt idx="44">
+                  <c:v>44132</c:v>
+                </c:pt>
+                <c:pt idx="45">
+                  <c:v>44131</c:v>
+                </c:pt>
+                <c:pt idx="46">
+                  <c:v>44130</c:v>
+                </c:pt>
+                <c:pt idx="47">
+                  <c:v>44127</c:v>
+                </c:pt>
+                <c:pt idx="48">
+                  <c:v>44126</c:v>
+                </c:pt>
+                <c:pt idx="49">
+                  <c:v>44125</c:v>
+                </c:pt>
+                <c:pt idx="50">
+                  <c:v>44124</c:v>
+                </c:pt>
+                <c:pt idx="51">
+                  <c:v>44123</c:v>
+                </c:pt>
+                <c:pt idx="52">
+                  <c:v>44120</c:v>
+                </c:pt>
+                <c:pt idx="53">
+                  <c:v>44119</c:v>
+                </c:pt>
+                <c:pt idx="54">
+                  <c:v>44118</c:v>
+                </c:pt>
+                <c:pt idx="55">
+                  <c:v>44117</c:v>
+                </c:pt>
+                <c:pt idx="56">
+                  <c:v>44116</c:v>
+                </c:pt>
+                <c:pt idx="57">
+                  <c:v>44113</c:v>
+                </c:pt>
+                <c:pt idx="58">
+                  <c:v>44112</c:v>
+                </c:pt>
+                <c:pt idx="59">
+                  <c:v>44111</c:v>
+                </c:pt>
+                <c:pt idx="60">
+                  <c:v>44110</c:v>
+                </c:pt>
+                <c:pt idx="61">
+                  <c:v>44109</c:v>
+                </c:pt>
+                <c:pt idx="62">
+                  <c:v>44106</c:v>
+                </c:pt>
+                <c:pt idx="63">
+                  <c:v>44105</c:v>
+                </c:pt>
+                <c:pt idx="64">
+                  <c:v>44104</c:v>
+                </c:pt>
+                <c:pt idx="65">
+                  <c:v>44103</c:v>
+                </c:pt>
+                <c:pt idx="66">
+                  <c:v>44102</c:v>
+                </c:pt>
+                <c:pt idx="67">
+                  <c:v>44099</c:v>
+                </c:pt>
+                <c:pt idx="68">
+                  <c:v>44098</c:v>
+                </c:pt>
+                <c:pt idx="69">
+                  <c:v>44097</c:v>
+                </c:pt>
+                <c:pt idx="70">
+                  <c:v>44096</c:v>
+                </c:pt>
+                <c:pt idx="71">
+                  <c:v>44095</c:v>
+                </c:pt>
+                <c:pt idx="72">
+                  <c:v>44092</c:v>
+                </c:pt>
+                <c:pt idx="73">
+                  <c:v>44091</c:v>
+                </c:pt>
+                <c:pt idx="74">
+                  <c:v>44090</c:v>
+                </c:pt>
+                <c:pt idx="75">
+                  <c:v>44089</c:v>
+                </c:pt>
+                <c:pt idx="76">
+                  <c:v>44088</c:v>
+                </c:pt>
+                <c:pt idx="77">
+                  <c:v>44085</c:v>
+                </c:pt>
+                <c:pt idx="78">
+                  <c:v>44084</c:v>
+                </c:pt>
+                <c:pt idx="79">
+                  <c:v>44083</c:v>
+                </c:pt>
+                <c:pt idx="80">
+                  <c:v>44082</c:v>
+                </c:pt>
+                <c:pt idx="81">
+                  <c:v>44078</c:v>
+                </c:pt>
+                <c:pt idx="82">
+                  <c:v>44077</c:v>
+                </c:pt>
+                <c:pt idx="83">
+                  <c:v>44076</c:v>
+                </c:pt>
+                <c:pt idx="84">
+                  <c:v>44075</c:v>
+                </c:pt>
+                <c:pt idx="85">
+                  <c:v>44074</c:v>
+                </c:pt>
+                <c:pt idx="86">
+                  <c:v>44071</c:v>
+                </c:pt>
+                <c:pt idx="87">
+                  <c:v>44070</c:v>
+                </c:pt>
+                <c:pt idx="88">
+                  <c:v>44069</c:v>
+                </c:pt>
+                <c:pt idx="89">
+                  <c:v>44068</c:v>
+                </c:pt>
+                <c:pt idx="90">
+                  <c:v>44067</c:v>
+                </c:pt>
+                <c:pt idx="91">
+                  <c:v>44064</c:v>
+                </c:pt>
+                <c:pt idx="92">
+                  <c:v>44063</c:v>
+                </c:pt>
+                <c:pt idx="93">
+                  <c:v>44062</c:v>
+                </c:pt>
+                <c:pt idx="94">
+                  <c:v>44061</c:v>
+                </c:pt>
+                <c:pt idx="95">
+                  <c:v>44060</c:v>
+                </c:pt>
+                <c:pt idx="96">
+                  <c:v>44057</c:v>
+                </c:pt>
+                <c:pt idx="97">
+                  <c:v>44056</c:v>
+                </c:pt>
+                <c:pt idx="98">
+                  <c:v>44055</c:v>
+                </c:pt>
+                <c:pt idx="99">
+                  <c:v>44054</c:v>
+                </c:pt>
+                <c:pt idx="100">
+                  <c:v>44053</c:v>
+                </c:pt>
+                <c:pt idx="101">
+                  <c:v>44050</c:v>
+                </c:pt>
+                <c:pt idx="102">
+                  <c:v>44049</c:v>
+                </c:pt>
+                <c:pt idx="103">
+                  <c:v>44048</c:v>
+                </c:pt>
+                <c:pt idx="104">
+                  <c:v>44047</c:v>
+                </c:pt>
+                <c:pt idx="105">
+                  <c:v>44046</c:v>
+                </c:pt>
+                <c:pt idx="106">
+                  <c:v>44043</c:v>
+                </c:pt>
+                <c:pt idx="107">
+                  <c:v>44042</c:v>
+                </c:pt>
+                <c:pt idx="108">
+                  <c:v>44041</c:v>
+                </c:pt>
+                <c:pt idx="109">
+                  <c:v>44040</c:v>
+                </c:pt>
+                <c:pt idx="110">
+                  <c:v>44039</c:v>
+                </c:pt>
+                <c:pt idx="111">
+                  <c:v>44036</c:v>
+                </c:pt>
+                <c:pt idx="112">
+                  <c:v>44035</c:v>
+                </c:pt>
+                <c:pt idx="113">
+                  <c:v>44034</c:v>
+                </c:pt>
+                <c:pt idx="114">
+                  <c:v>44033</c:v>
+                </c:pt>
+                <c:pt idx="115">
+                  <c:v>44032</c:v>
+                </c:pt>
+                <c:pt idx="116">
+                  <c:v>44029</c:v>
+                </c:pt>
+                <c:pt idx="117">
+                  <c:v>44028</c:v>
+                </c:pt>
+                <c:pt idx="118">
+                  <c:v>44027</c:v>
+                </c:pt>
+                <c:pt idx="119">
+                  <c:v>44026</c:v>
+                </c:pt>
+                <c:pt idx="120">
+                  <c:v>44025</c:v>
+                </c:pt>
+                <c:pt idx="121">
+                  <c:v>44022</c:v>
+                </c:pt>
+                <c:pt idx="122">
+                  <c:v>44021</c:v>
+                </c:pt>
+                <c:pt idx="123">
+                  <c:v>44020</c:v>
+                </c:pt>
+                <c:pt idx="124">
+                  <c:v>44019</c:v>
+                </c:pt>
+                <c:pt idx="125">
+                  <c:v>44018</c:v>
+                </c:pt>
+                <c:pt idx="126">
+                  <c:v>44014</c:v>
+                </c:pt>
+                <c:pt idx="127">
+                  <c:v>44013</c:v>
+                </c:pt>
+                <c:pt idx="128">
+                  <c:v>44012</c:v>
+                </c:pt>
+                <c:pt idx="129">
+                  <c:v>44011</c:v>
+                </c:pt>
+                <c:pt idx="130">
+                  <c:v>44008</c:v>
+                </c:pt>
+                <c:pt idx="131">
+                  <c:v>44007</c:v>
+                </c:pt>
+                <c:pt idx="132">
+                  <c:v>44006</c:v>
+                </c:pt>
+                <c:pt idx="133">
+                  <c:v>44005</c:v>
+                </c:pt>
+                <c:pt idx="134">
+                  <c:v>44004</c:v>
+                </c:pt>
+                <c:pt idx="135">
+                  <c:v>44001</c:v>
+                </c:pt>
+                <c:pt idx="136">
+                  <c:v>44000</c:v>
+                </c:pt>
+                <c:pt idx="137">
+                  <c:v>43999</c:v>
+                </c:pt>
+                <c:pt idx="138">
+                  <c:v>43998</c:v>
+                </c:pt>
+                <c:pt idx="139">
+                  <c:v>43997</c:v>
+                </c:pt>
+                <c:pt idx="140">
+                  <c:v>43994</c:v>
+                </c:pt>
+                <c:pt idx="141">
+                  <c:v>43993</c:v>
+                </c:pt>
+                <c:pt idx="142">
+                  <c:v>43992</c:v>
+                </c:pt>
+                <c:pt idx="143">
+                  <c:v>43991</c:v>
+                </c:pt>
+                <c:pt idx="144">
+                  <c:v>43990</c:v>
+                </c:pt>
+                <c:pt idx="145">
+                  <c:v>43987</c:v>
+                </c:pt>
+                <c:pt idx="146">
+                  <c:v>43986</c:v>
+                </c:pt>
+                <c:pt idx="147">
+                  <c:v>43985</c:v>
+                </c:pt>
+                <c:pt idx="148">
+                  <c:v>43984</c:v>
+                </c:pt>
+                <c:pt idx="149">
+                  <c:v>43983</c:v>
+                </c:pt>
+                <c:pt idx="150">
+                  <c:v>43980</c:v>
+                </c:pt>
+                <c:pt idx="151">
+                  <c:v>43979</c:v>
+                </c:pt>
+                <c:pt idx="152">
+                  <c:v>43978</c:v>
+                </c:pt>
+                <c:pt idx="153">
+                  <c:v>43977</c:v>
+                </c:pt>
+                <c:pt idx="154">
+                  <c:v>43973</c:v>
+                </c:pt>
+                <c:pt idx="155">
+                  <c:v>43972</c:v>
+                </c:pt>
+                <c:pt idx="156">
+                  <c:v>43971</c:v>
+                </c:pt>
+                <c:pt idx="157">
+                  <c:v>43970</c:v>
+                </c:pt>
+                <c:pt idx="158">
+                  <c:v>43969</c:v>
+                </c:pt>
+                <c:pt idx="159">
+                  <c:v>43966</c:v>
+                </c:pt>
+                <c:pt idx="160">
+                  <c:v>43965</c:v>
+                </c:pt>
+                <c:pt idx="161">
+                  <c:v>43964</c:v>
+                </c:pt>
+                <c:pt idx="162">
+                  <c:v>43963</c:v>
+                </c:pt>
+                <c:pt idx="163">
+                  <c:v>43962</c:v>
+                </c:pt>
+                <c:pt idx="164">
+                  <c:v>43959</c:v>
+                </c:pt>
+                <c:pt idx="165">
+                  <c:v>43958</c:v>
+                </c:pt>
+                <c:pt idx="166">
+                  <c:v>43957</c:v>
+                </c:pt>
+                <c:pt idx="167">
+                  <c:v>43956</c:v>
+                </c:pt>
+                <c:pt idx="168">
+                  <c:v>43955</c:v>
+                </c:pt>
+                <c:pt idx="169">
+                  <c:v>43952</c:v>
+                </c:pt>
+                <c:pt idx="170">
+                  <c:v>43951</c:v>
+                </c:pt>
+                <c:pt idx="171">
+                  <c:v>43950</c:v>
+                </c:pt>
+                <c:pt idx="172">
+                  <c:v>43949</c:v>
+                </c:pt>
+                <c:pt idx="173">
+                  <c:v>43948</c:v>
+                </c:pt>
+                <c:pt idx="174">
+                  <c:v>43945</c:v>
+                </c:pt>
+                <c:pt idx="175">
+                  <c:v>43944</c:v>
+                </c:pt>
+                <c:pt idx="176">
+                  <c:v>43943</c:v>
+                </c:pt>
+                <c:pt idx="177">
+                  <c:v>43942</c:v>
+                </c:pt>
+                <c:pt idx="178">
+                  <c:v>43941</c:v>
+                </c:pt>
+                <c:pt idx="179">
+                  <c:v>43938</c:v>
+                </c:pt>
+                <c:pt idx="180">
+                  <c:v>43937</c:v>
+                </c:pt>
+                <c:pt idx="181">
+                  <c:v>43936</c:v>
+                </c:pt>
+                <c:pt idx="182">
+                  <c:v>43935</c:v>
+                </c:pt>
+                <c:pt idx="183">
+                  <c:v>43934</c:v>
+                </c:pt>
+                <c:pt idx="184">
+                  <c:v>43930</c:v>
+                </c:pt>
+                <c:pt idx="185">
+                  <c:v>43929</c:v>
+                </c:pt>
+                <c:pt idx="186">
+                  <c:v>43928</c:v>
+                </c:pt>
+                <c:pt idx="187">
+                  <c:v>43927</c:v>
+                </c:pt>
+                <c:pt idx="188">
+                  <c:v>43924</c:v>
+                </c:pt>
+                <c:pt idx="189">
+                  <c:v>43923</c:v>
+                </c:pt>
+                <c:pt idx="190">
+                  <c:v>43922</c:v>
+                </c:pt>
+                <c:pt idx="191">
+                  <c:v>43921</c:v>
+                </c:pt>
+                <c:pt idx="192">
+                  <c:v>43920</c:v>
+                </c:pt>
+                <c:pt idx="193">
+                  <c:v>43917</c:v>
+                </c:pt>
+                <c:pt idx="194">
+                  <c:v>43916</c:v>
+                </c:pt>
+                <c:pt idx="195">
+                  <c:v>43915</c:v>
+                </c:pt>
+                <c:pt idx="196">
+                  <c:v>43914</c:v>
+                </c:pt>
+                <c:pt idx="197">
+                  <c:v>43913</c:v>
+                </c:pt>
+                <c:pt idx="198">
+                  <c:v>43910</c:v>
+                </c:pt>
+                <c:pt idx="199">
+                  <c:v>43909</c:v>
+                </c:pt>
+                <c:pt idx="200">
+                  <c:v>43908</c:v>
+                </c:pt>
+                <c:pt idx="201">
+                  <c:v>43907</c:v>
+                </c:pt>
+                <c:pt idx="202">
+                  <c:v>43906</c:v>
+                </c:pt>
+                <c:pt idx="203">
+                  <c:v>43903</c:v>
+                </c:pt>
+                <c:pt idx="204">
+                  <c:v>43902</c:v>
+                </c:pt>
+                <c:pt idx="205">
+                  <c:v>43901</c:v>
+                </c:pt>
+                <c:pt idx="206">
+                  <c:v>43900</c:v>
+                </c:pt>
+                <c:pt idx="207">
+                  <c:v>43899</c:v>
+                </c:pt>
+                <c:pt idx="208">
+                  <c:v>43896</c:v>
+                </c:pt>
+                <c:pt idx="209">
+                  <c:v>43895</c:v>
+                </c:pt>
+                <c:pt idx="210">
+                  <c:v>43894</c:v>
+                </c:pt>
+                <c:pt idx="211">
+                  <c:v>43893</c:v>
+                </c:pt>
+                <c:pt idx="212">
+                  <c:v>43892</c:v>
+                </c:pt>
+                <c:pt idx="213">
+                  <c:v>43889</c:v>
+                </c:pt>
+                <c:pt idx="214">
+                  <c:v>43888</c:v>
+                </c:pt>
+                <c:pt idx="215">
+                  <c:v>43887</c:v>
+                </c:pt>
+                <c:pt idx="216">
+                  <c:v>43886</c:v>
+                </c:pt>
+                <c:pt idx="217">
+                  <c:v>43885</c:v>
+                </c:pt>
+                <c:pt idx="218">
+                  <c:v>43882</c:v>
+                </c:pt>
+                <c:pt idx="219">
+                  <c:v>43881</c:v>
+                </c:pt>
+                <c:pt idx="220">
+                  <c:v>43880</c:v>
+                </c:pt>
+                <c:pt idx="221">
+                  <c:v>43879</c:v>
+                </c:pt>
+                <c:pt idx="222">
+                  <c:v>43875</c:v>
+                </c:pt>
+                <c:pt idx="223">
+                  <c:v>43874</c:v>
+                </c:pt>
+                <c:pt idx="224">
+                  <c:v>43873</c:v>
+                </c:pt>
+                <c:pt idx="225">
+                  <c:v>43872</c:v>
+                </c:pt>
+                <c:pt idx="226">
+                  <c:v>43871</c:v>
+                </c:pt>
+                <c:pt idx="227">
+                  <c:v>43868</c:v>
+                </c:pt>
+                <c:pt idx="228">
+                  <c:v>43867</c:v>
+                </c:pt>
+                <c:pt idx="229">
+                  <c:v>43866</c:v>
+                </c:pt>
+                <c:pt idx="230">
+                  <c:v>43865</c:v>
+                </c:pt>
+                <c:pt idx="231">
+                  <c:v>43864</c:v>
+                </c:pt>
+                <c:pt idx="232">
+                  <c:v>43861</c:v>
+                </c:pt>
+                <c:pt idx="233">
+                  <c:v>43860</c:v>
+                </c:pt>
+                <c:pt idx="234">
+                  <c:v>43859</c:v>
+                </c:pt>
+                <c:pt idx="235">
+                  <c:v>43858</c:v>
+                </c:pt>
+                <c:pt idx="236">
+                  <c:v>43857</c:v>
+                </c:pt>
+                <c:pt idx="237">
+                  <c:v>43854</c:v>
+                </c:pt>
+                <c:pt idx="238">
+                  <c:v>43853</c:v>
+                </c:pt>
+                <c:pt idx="239">
+                  <c:v>43852</c:v>
+                </c:pt>
+                <c:pt idx="240">
+                  <c:v>43851</c:v>
+                </c:pt>
+                <c:pt idx="241">
+                  <c:v>43847</c:v>
+                </c:pt>
+                <c:pt idx="242">
+                  <c:v>43846</c:v>
+                </c:pt>
+                <c:pt idx="243">
+                  <c:v>43845</c:v>
+                </c:pt>
+                <c:pt idx="244">
+                  <c:v>43844</c:v>
+                </c:pt>
+                <c:pt idx="245">
+                  <c:v>43843</c:v>
+                </c:pt>
+                <c:pt idx="246">
+                  <c:v>43840</c:v>
+                </c:pt>
+                <c:pt idx="247">
+                  <c:v>43839</c:v>
+                </c:pt>
+                <c:pt idx="248">
+                  <c:v>43838</c:v>
+                </c:pt>
+                <c:pt idx="249">
+                  <c:v>43837</c:v>
+                </c:pt>
+                <c:pt idx="250">
+                  <c:v>43836</c:v>
+                </c:pt>
+                <c:pt idx="251">
+                  <c:v>43833</c:v>
+                </c:pt>
+                <c:pt idx="252">
+                  <c:v>43832</c:v>
+                </c:pt>
+                <c:pt idx="253">
+                  <c:v>43830</c:v>
+                </c:pt>
+                <c:pt idx="254">
+                  <c:v>43829</c:v>
+                </c:pt>
+                <c:pt idx="255">
+                  <c:v>43826</c:v>
+                </c:pt>
+                <c:pt idx="256">
+                  <c:v>43825</c:v>
+                </c:pt>
+                <c:pt idx="257">
+                  <c:v>43823</c:v>
+                </c:pt>
+                <c:pt idx="258">
+                  <c:v>43822</c:v>
+                </c:pt>
+                <c:pt idx="259">
+                  <c:v>43819</c:v>
+                </c:pt>
+                <c:pt idx="260">
+                  <c:v>43818</c:v>
+                </c:pt>
+                <c:pt idx="261">
+                  <c:v>43817</c:v>
+                </c:pt>
+                <c:pt idx="262">
+                  <c:v>43816</c:v>
+                </c:pt>
+                <c:pt idx="263">
+                  <c:v>43815</c:v>
+                </c:pt>
+                <c:pt idx="264">
+                  <c:v>43812</c:v>
+                </c:pt>
+                <c:pt idx="265">
+                  <c:v>43811</c:v>
+                </c:pt>
+                <c:pt idx="266">
+                  <c:v>43810</c:v>
+                </c:pt>
+                <c:pt idx="267">
+                  <c:v>43809</c:v>
+                </c:pt>
+                <c:pt idx="268">
+                  <c:v>43808</c:v>
+                </c:pt>
+                <c:pt idx="269">
+                  <c:v>43805</c:v>
+                </c:pt>
+                <c:pt idx="270">
+                  <c:v>43804</c:v>
+                </c:pt>
+                <c:pt idx="271">
+                  <c:v>43803</c:v>
+                </c:pt>
+                <c:pt idx="272">
+                  <c:v>43802</c:v>
+                </c:pt>
+                <c:pt idx="273">
+                  <c:v>43801</c:v>
+                </c:pt>
+                <c:pt idx="274">
+                  <c:v>43798</c:v>
+                </c:pt>
+                <c:pt idx="275">
+                  <c:v>43796</c:v>
+                </c:pt>
+                <c:pt idx="276">
+                  <c:v>43795</c:v>
+                </c:pt>
+                <c:pt idx="277">
+                  <c:v>43794</c:v>
+                </c:pt>
+                <c:pt idx="278">
+                  <c:v>43791</c:v>
+                </c:pt>
+                <c:pt idx="279">
+                  <c:v>43790</c:v>
+                </c:pt>
+                <c:pt idx="280">
+                  <c:v>43789</c:v>
+                </c:pt>
+                <c:pt idx="281">
+                  <c:v>43788</c:v>
+                </c:pt>
+                <c:pt idx="282">
+                  <c:v>43787</c:v>
+                </c:pt>
+                <c:pt idx="283">
+                  <c:v>43784</c:v>
+                </c:pt>
+                <c:pt idx="284">
+                  <c:v>43783</c:v>
+                </c:pt>
+                <c:pt idx="285">
+                  <c:v>43782</c:v>
+                </c:pt>
+                <c:pt idx="286">
+                  <c:v>43781</c:v>
+                </c:pt>
+                <c:pt idx="287">
+                  <c:v>43780</c:v>
+                </c:pt>
+                <c:pt idx="288">
+                  <c:v>43777</c:v>
+                </c:pt>
+                <c:pt idx="289">
+                  <c:v>43776</c:v>
+                </c:pt>
+                <c:pt idx="290">
+                  <c:v>43775</c:v>
+                </c:pt>
+                <c:pt idx="291">
+                  <c:v>43774</c:v>
+                </c:pt>
+                <c:pt idx="292">
+                  <c:v>43773</c:v>
+                </c:pt>
+                <c:pt idx="293">
+                  <c:v>43770</c:v>
+                </c:pt>
+                <c:pt idx="294">
+                  <c:v>43769</c:v>
+                </c:pt>
+                <c:pt idx="295">
+                  <c:v>43768</c:v>
+                </c:pt>
+                <c:pt idx="296">
+                  <c:v>43767</c:v>
+                </c:pt>
+                <c:pt idx="297">
+                  <c:v>43766</c:v>
+                </c:pt>
+                <c:pt idx="298">
+                  <c:v>43763</c:v>
+                </c:pt>
+                <c:pt idx="299">
+                  <c:v>43762</c:v>
+                </c:pt>
+                <c:pt idx="300">
+                  <c:v>43761</c:v>
+                </c:pt>
+                <c:pt idx="301">
+                  <c:v>43760</c:v>
+                </c:pt>
+                <c:pt idx="302">
+                  <c:v>43759</c:v>
+                </c:pt>
+                <c:pt idx="303">
+                  <c:v>43756</c:v>
+                </c:pt>
+                <c:pt idx="304">
+                  <c:v>43755</c:v>
+                </c:pt>
+                <c:pt idx="305">
+                  <c:v>43754</c:v>
+                </c:pt>
+                <c:pt idx="306">
+                  <c:v>43753</c:v>
+                </c:pt>
+                <c:pt idx="307">
+                  <c:v>43752</c:v>
+                </c:pt>
+                <c:pt idx="308">
+                  <c:v>43749</c:v>
+                </c:pt>
+                <c:pt idx="309">
+                  <c:v>43748</c:v>
+                </c:pt>
+                <c:pt idx="310">
+                  <c:v>43747</c:v>
+                </c:pt>
+                <c:pt idx="311">
+                  <c:v>43746</c:v>
+                </c:pt>
+                <c:pt idx="312">
+                  <c:v>43745</c:v>
+                </c:pt>
+                <c:pt idx="313">
+                  <c:v>43742</c:v>
+                </c:pt>
+                <c:pt idx="314">
+                  <c:v>43741</c:v>
+                </c:pt>
+                <c:pt idx="315">
+                  <c:v>43740</c:v>
+                </c:pt>
+                <c:pt idx="316">
+                  <c:v>43739</c:v>
+                </c:pt>
+                <c:pt idx="317">
+                  <c:v>43738</c:v>
+                </c:pt>
+                <c:pt idx="318">
+                  <c:v>43735</c:v>
+                </c:pt>
+                <c:pt idx="319">
+                  <c:v>43734</c:v>
+                </c:pt>
+                <c:pt idx="320">
+                  <c:v>43733</c:v>
+                </c:pt>
+                <c:pt idx="321">
+                  <c:v>43732</c:v>
+                </c:pt>
+                <c:pt idx="322">
+                  <c:v>43731</c:v>
+                </c:pt>
+                <c:pt idx="323">
+                  <c:v>43728</c:v>
+                </c:pt>
+                <c:pt idx="324">
+                  <c:v>43727</c:v>
+                </c:pt>
+                <c:pt idx="325">
+                  <c:v>43726</c:v>
+                </c:pt>
+                <c:pt idx="326">
+                  <c:v>43725</c:v>
+                </c:pt>
+                <c:pt idx="327">
+                  <c:v>43724</c:v>
+                </c:pt>
+                <c:pt idx="328">
+                  <c:v>43721</c:v>
+                </c:pt>
+                <c:pt idx="329">
+                  <c:v>43720</c:v>
+                </c:pt>
+                <c:pt idx="330">
+                  <c:v>43719</c:v>
+                </c:pt>
+                <c:pt idx="331">
+                  <c:v>43718</c:v>
+                </c:pt>
+                <c:pt idx="332">
+                  <c:v>43717</c:v>
+                </c:pt>
+                <c:pt idx="333">
+                  <c:v>43714</c:v>
+                </c:pt>
+                <c:pt idx="334">
+                  <c:v>43713</c:v>
+                </c:pt>
+                <c:pt idx="335">
+                  <c:v>43712</c:v>
+                </c:pt>
+                <c:pt idx="336">
+                  <c:v>43711</c:v>
+                </c:pt>
+                <c:pt idx="337">
+                  <c:v>43707</c:v>
+                </c:pt>
+                <c:pt idx="338">
+                  <c:v>43706</c:v>
+                </c:pt>
+                <c:pt idx="339">
+                  <c:v>43705</c:v>
+                </c:pt>
+                <c:pt idx="340">
+                  <c:v>43704</c:v>
+                </c:pt>
+                <c:pt idx="341">
+                  <c:v>43703</c:v>
+                </c:pt>
+                <c:pt idx="342">
+                  <c:v>43700</c:v>
+                </c:pt>
+                <c:pt idx="343">
+                  <c:v>43699</c:v>
+                </c:pt>
+                <c:pt idx="344">
+                  <c:v>43698</c:v>
+                </c:pt>
+                <c:pt idx="345">
+                  <c:v>43697</c:v>
+                </c:pt>
+                <c:pt idx="346">
+                  <c:v>43696</c:v>
+                </c:pt>
+                <c:pt idx="347">
+                  <c:v>43693</c:v>
+                </c:pt>
+                <c:pt idx="348">
+                  <c:v>43692</c:v>
+                </c:pt>
+                <c:pt idx="349">
+                  <c:v>43691</c:v>
+                </c:pt>
+                <c:pt idx="350">
+                  <c:v>43690</c:v>
+                </c:pt>
+                <c:pt idx="351">
+                  <c:v>43689</c:v>
+                </c:pt>
+                <c:pt idx="352">
+                  <c:v>43686</c:v>
+                </c:pt>
+                <c:pt idx="353">
+                  <c:v>43685</c:v>
+                </c:pt>
+                <c:pt idx="354">
+                  <c:v>43684</c:v>
+                </c:pt>
+                <c:pt idx="355">
+                  <c:v>43683</c:v>
+                </c:pt>
+                <c:pt idx="356">
+                  <c:v>43682</c:v>
+                </c:pt>
+                <c:pt idx="357">
+                  <c:v>43679</c:v>
+                </c:pt>
+                <c:pt idx="358">
+                  <c:v>43678</c:v>
+                </c:pt>
+                <c:pt idx="359">
+                  <c:v>43677</c:v>
+                </c:pt>
+                <c:pt idx="360">
+                  <c:v>43676</c:v>
+                </c:pt>
+                <c:pt idx="361">
+                  <c:v>43675</c:v>
+                </c:pt>
+                <c:pt idx="362">
+                  <c:v>43672</c:v>
+                </c:pt>
+                <c:pt idx="363">
+                  <c:v>43671</c:v>
+                </c:pt>
+                <c:pt idx="364">
+                  <c:v>43670</c:v>
+                </c:pt>
+                <c:pt idx="365">
+                  <c:v>43669</c:v>
+                </c:pt>
+                <c:pt idx="366">
+                  <c:v>43668</c:v>
+                </c:pt>
+                <c:pt idx="367">
+                  <c:v>43665</c:v>
+                </c:pt>
+                <c:pt idx="368">
+                  <c:v>43664</c:v>
+                </c:pt>
+                <c:pt idx="369">
+                  <c:v>43663</c:v>
+                </c:pt>
+                <c:pt idx="370">
+                  <c:v>43662</c:v>
+                </c:pt>
+                <c:pt idx="371">
+                  <c:v>43661</c:v>
+                </c:pt>
+                <c:pt idx="372">
+                  <c:v>43658</c:v>
+                </c:pt>
+                <c:pt idx="373">
+                  <c:v>43657</c:v>
+                </c:pt>
+                <c:pt idx="374">
+                  <c:v>43656</c:v>
+                </c:pt>
+                <c:pt idx="375">
+                  <c:v>43655</c:v>
+                </c:pt>
+                <c:pt idx="376">
+                  <c:v>43654</c:v>
+                </c:pt>
+                <c:pt idx="377">
+                  <c:v>43651</c:v>
+                </c:pt>
+                <c:pt idx="378">
+                  <c:v>43649</c:v>
+                </c:pt>
+                <c:pt idx="379">
+                  <c:v>43648</c:v>
+                </c:pt>
+                <c:pt idx="380">
+                  <c:v>43647</c:v>
+                </c:pt>
+                <c:pt idx="381">
+                  <c:v>43644</c:v>
+                </c:pt>
+                <c:pt idx="382">
+                  <c:v>43643</c:v>
+                </c:pt>
+                <c:pt idx="383">
+                  <c:v>43642</c:v>
+                </c:pt>
+                <c:pt idx="384">
+                  <c:v>43641</c:v>
+                </c:pt>
+                <c:pt idx="385">
+                  <c:v>43640</c:v>
+                </c:pt>
+                <c:pt idx="386">
+                  <c:v>43637</c:v>
+                </c:pt>
+                <c:pt idx="387">
+                  <c:v>43636</c:v>
+                </c:pt>
+                <c:pt idx="388">
+                  <c:v>43635</c:v>
+                </c:pt>
+                <c:pt idx="389">
+                  <c:v>43634</c:v>
+                </c:pt>
+                <c:pt idx="390">
+                  <c:v>43633</c:v>
+                </c:pt>
+                <c:pt idx="391">
+                  <c:v>43630</c:v>
+                </c:pt>
+                <c:pt idx="392">
+                  <c:v>43629</c:v>
+                </c:pt>
+                <c:pt idx="393">
+                  <c:v>43628</c:v>
+                </c:pt>
+                <c:pt idx="394">
+                  <c:v>43627</c:v>
+                </c:pt>
+                <c:pt idx="395">
+                  <c:v>43626</c:v>
+                </c:pt>
+                <c:pt idx="396">
+                  <c:v>43623</c:v>
+                </c:pt>
+                <c:pt idx="397">
+                  <c:v>43622</c:v>
+                </c:pt>
+                <c:pt idx="398">
+                  <c:v>43621</c:v>
+                </c:pt>
+                <c:pt idx="399">
+                  <c:v>43620</c:v>
+                </c:pt>
+                <c:pt idx="400">
+                  <c:v>43619</c:v>
+                </c:pt>
+                <c:pt idx="401">
+                  <c:v>43616</c:v>
+                </c:pt>
+                <c:pt idx="402">
+                  <c:v>43615</c:v>
+                </c:pt>
+                <c:pt idx="403">
+                  <c:v>43614</c:v>
+                </c:pt>
+                <c:pt idx="404">
+                  <c:v>43613</c:v>
+                </c:pt>
+                <c:pt idx="405">
+                  <c:v>43609</c:v>
+                </c:pt>
+                <c:pt idx="406">
+                  <c:v>43608</c:v>
+                </c:pt>
+                <c:pt idx="407">
+                  <c:v>43607</c:v>
+                </c:pt>
+                <c:pt idx="408">
+                  <c:v>43606</c:v>
+                </c:pt>
+                <c:pt idx="409">
+                  <c:v>43605</c:v>
+                </c:pt>
+                <c:pt idx="410">
+                  <c:v>43602</c:v>
+                </c:pt>
+                <c:pt idx="411">
+                  <c:v>43601</c:v>
+                </c:pt>
+                <c:pt idx="412">
+                  <c:v>43600</c:v>
+                </c:pt>
+                <c:pt idx="413">
+                  <c:v>43599</c:v>
+                </c:pt>
+                <c:pt idx="414">
+                  <c:v>43598</c:v>
+                </c:pt>
+                <c:pt idx="415">
+                  <c:v>43595</c:v>
+                </c:pt>
+                <c:pt idx="416">
+                  <c:v>43594</c:v>
+                </c:pt>
+                <c:pt idx="417">
+                  <c:v>43593</c:v>
+                </c:pt>
+                <c:pt idx="418">
+                  <c:v>43592</c:v>
+                </c:pt>
+                <c:pt idx="419">
+                  <c:v>43591</c:v>
+                </c:pt>
+                <c:pt idx="420">
+                  <c:v>43588</c:v>
+                </c:pt>
+                <c:pt idx="421">
+                  <c:v>43587</c:v>
+                </c:pt>
+                <c:pt idx="422">
+                  <c:v>43586</c:v>
+                </c:pt>
+                <c:pt idx="423">
+                  <c:v>43585</c:v>
+                </c:pt>
+                <c:pt idx="424">
+                  <c:v>43584</c:v>
+                </c:pt>
+                <c:pt idx="425">
+                  <c:v>43581</c:v>
+                </c:pt>
+                <c:pt idx="426">
+                  <c:v>43580</c:v>
+                </c:pt>
+                <c:pt idx="427">
+                  <c:v>43579</c:v>
+                </c:pt>
+                <c:pt idx="428">
+                  <c:v>43578</c:v>
+                </c:pt>
+                <c:pt idx="429">
+                  <c:v>43577</c:v>
+                </c:pt>
+                <c:pt idx="430">
+                  <c:v>43573</c:v>
+                </c:pt>
+                <c:pt idx="431">
+                  <c:v>43572</c:v>
+                </c:pt>
+                <c:pt idx="432">
+                  <c:v>43571</c:v>
+                </c:pt>
+                <c:pt idx="433">
+                  <c:v>43570</c:v>
+                </c:pt>
+                <c:pt idx="434">
+                  <c:v>43567</c:v>
+                </c:pt>
+                <c:pt idx="435">
+                  <c:v>43566</c:v>
+                </c:pt>
+                <c:pt idx="436">
+                  <c:v>43565</c:v>
+                </c:pt>
+                <c:pt idx="437">
+                  <c:v>43564</c:v>
+                </c:pt>
+                <c:pt idx="438">
+                  <c:v>43563</c:v>
+                </c:pt>
+                <c:pt idx="439">
+                  <c:v>43560</c:v>
+                </c:pt>
+                <c:pt idx="440">
+                  <c:v>43559</c:v>
+                </c:pt>
+                <c:pt idx="441">
+                  <c:v>43558</c:v>
+                </c:pt>
+                <c:pt idx="442">
+                  <c:v>43557</c:v>
+                </c:pt>
+                <c:pt idx="443">
+                  <c:v>43556</c:v>
+                </c:pt>
+                <c:pt idx="444">
+                  <c:v>43553</c:v>
+                </c:pt>
+                <c:pt idx="445">
+                  <c:v>43552</c:v>
+                </c:pt>
+                <c:pt idx="446">
+                  <c:v>43551</c:v>
+                </c:pt>
+                <c:pt idx="447">
+                  <c:v>43550</c:v>
+                </c:pt>
+                <c:pt idx="448">
+                  <c:v>43549</c:v>
+                </c:pt>
+                <c:pt idx="449">
+                  <c:v>43546</c:v>
+                </c:pt>
+                <c:pt idx="450">
+                  <c:v>43545</c:v>
+                </c:pt>
+                <c:pt idx="451">
+                  <c:v>43544</c:v>
+                </c:pt>
+                <c:pt idx="452">
+                  <c:v>43543</c:v>
+                </c:pt>
+                <c:pt idx="453">
+                  <c:v>43542</c:v>
+                </c:pt>
+                <c:pt idx="454">
+                  <c:v>43539</c:v>
+                </c:pt>
+                <c:pt idx="455">
+                  <c:v>43538</c:v>
+                </c:pt>
+                <c:pt idx="456">
+                  <c:v>43537</c:v>
+                </c:pt>
+                <c:pt idx="457">
+                  <c:v>43536</c:v>
+                </c:pt>
+                <c:pt idx="458">
+                  <c:v>43535</c:v>
+                </c:pt>
+                <c:pt idx="459">
+                  <c:v>43532</c:v>
+                </c:pt>
+                <c:pt idx="460">
+                  <c:v>43531</c:v>
+                </c:pt>
+                <c:pt idx="461">
+                  <c:v>43530</c:v>
+                </c:pt>
+                <c:pt idx="462">
+                  <c:v>43529</c:v>
+                </c:pt>
+                <c:pt idx="463">
+                  <c:v>43528</c:v>
+                </c:pt>
+                <c:pt idx="464">
+                  <c:v>43525</c:v>
+                </c:pt>
+                <c:pt idx="465">
+                  <c:v>43524</c:v>
+                </c:pt>
+                <c:pt idx="466">
+                  <c:v>43523</c:v>
+                </c:pt>
+                <c:pt idx="467">
+                  <c:v>43522</c:v>
+                </c:pt>
+                <c:pt idx="468">
+                  <c:v>43521</c:v>
+                </c:pt>
+                <c:pt idx="469">
+                  <c:v>43518</c:v>
+                </c:pt>
+                <c:pt idx="470">
+                  <c:v>43517</c:v>
+                </c:pt>
+                <c:pt idx="471">
+                  <c:v>43516</c:v>
+                </c:pt>
+                <c:pt idx="472">
+                  <c:v>43515</c:v>
+                </c:pt>
+                <c:pt idx="473">
+                  <c:v>43511</c:v>
+                </c:pt>
+                <c:pt idx="474">
+                  <c:v>43510</c:v>
+                </c:pt>
+                <c:pt idx="475">
+                  <c:v>43509</c:v>
+                </c:pt>
+                <c:pt idx="476">
+                  <c:v>43508</c:v>
+                </c:pt>
+                <c:pt idx="477">
+                  <c:v>43507</c:v>
+                </c:pt>
+                <c:pt idx="478">
+                  <c:v>43504</c:v>
+                </c:pt>
+                <c:pt idx="479">
+                  <c:v>43503</c:v>
+                </c:pt>
+                <c:pt idx="480">
+                  <c:v>43502</c:v>
+                </c:pt>
+                <c:pt idx="481">
+                  <c:v>43501</c:v>
+                </c:pt>
+                <c:pt idx="482">
+                  <c:v>43500</c:v>
+                </c:pt>
+                <c:pt idx="483">
+                  <c:v>43497</c:v>
+                </c:pt>
+                <c:pt idx="484">
+                  <c:v>43496</c:v>
+                </c:pt>
+                <c:pt idx="485">
+                  <c:v>43495</c:v>
+                </c:pt>
+                <c:pt idx="486">
+                  <c:v>43494</c:v>
+                </c:pt>
+                <c:pt idx="487">
+                  <c:v>43493</c:v>
+                </c:pt>
+                <c:pt idx="488">
+                  <c:v>43490</c:v>
+                </c:pt>
+                <c:pt idx="489">
+                  <c:v>43489</c:v>
+                </c:pt>
+                <c:pt idx="490">
+                  <c:v>43488</c:v>
+                </c:pt>
+                <c:pt idx="491">
+                  <c:v>43487</c:v>
+                </c:pt>
+                <c:pt idx="492">
+                  <c:v>43483</c:v>
+                </c:pt>
+                <c:pt idx="493">
+                  <c:v>43482</c:v>
+                </c:pt>
+                <c:pt idx="494">
+                  <c:v>43481</c:v>
+                </c:pt>
+                <c:pt idx="495">
+                  <c:v>43480</c:v>
+                </c:pt>
+                <c:pt idx="496">
+                  <c:v>43479</c:v>
+                </c:pt>
+                <c:pt idx="497">
+                  <c:v>43476</c:v>
+                </c:pt>
+                <c:pt idx="498">
+                  <c:v>43475</c:v>
+                </c:pt>
+                <c:pt idx="499">
+                  <c:v>43474</c:v>
+                </c:pt>
+                <c:pt idx="500">
+                  <c:v>43473</c:v>
+                </c:pt>
+                <c:pt idx="501">
+                  <c:v>43472</c:v>
+                </c:pt>
+                <c:pt idx="502">
+                  <c:v>43469</c:v>
+                </c:pt>
+                <c:pt idx="503">
+                  <c:v>43468</c:v>
+                </c:pt>
+                <c:pt idx="504">
+                  <c:v>43467</c:v>
+                </c:pt>
+                <c:pt idx="505">
+                  <c:v>43465</c:v>
+                </c:pt>
+                <c:pt idx="506">
+                  <c:v>43462</c:v>
+                </c:pt>
+                <c:pt idx="507">
+                  <c:v>43461</c:v>
+                </c:pt>
+                <c:pt idx="508">
+                  <c:v>43460</c:v>
+                </c:pt>
+                <c:pt idx="509">
+                  <c:v>43458</c:v>
+                </c:pt>
+                <c:pt idx="510">
+                  <c:v>43455</c:v>
+                </c:pt>
+                <c:pt idx="511">
+                  <c:v>43454</c:v>
+                </c:pt>
+                <c:pt idx="512">
+                  <c:v>43453</c:v>
+                </c:pt>
+                <c:pt idx="513">
+                  <c:v>43452</c:v>
+                </c:pt>
+                <c:pt idx="514">
+                  <c:v>43451</c:v>
+                </c:pt>
+                <c:pt idx="515">
+                  <c:v>43448</c:v>
+                </c:pt>
+                <c:pt idx="516">
+                  <c:v>43447</c:v>
+                </c:pt>
+                <c:pt idx="517">
+                  <c:v>43446</c:v>
+                </c:pt>
+                <c:pt idx="518">
+                  <c:v>43445</c:v>
+                </c:pt>
+                <c:pt idx="519">
+                  <c:v>43444</c:v>
+                </c:pt>
+                <c:pt idx="520">
+                  <c:v>43441</c:v>
+                </c:pt>
+                <c:pt idx="521">
+                  <c:v>43440</c:v>
+                </c:pt>
+                <c:pt idx="522">
+                  <c:v>43438</c:v>
+                </c:pt>
+                <c:pt idx="523">
+                  <c:v>43437</c:v>
+                </c:pt>
+                <c:pt idx="524">
+                  <c:v>43434</c:v>
+                </c:pt>
+                <c:pt idx="525">
+                  <c:v>43433</c:v>
+                </c:pt>
+                <c:pt idx="526">
+                  <c:v>43432</c:v>
+                </c:pt>
+                <c:pt idx="527">
+                  <c:v>43431</c:v>
+                </c:pt>
+                <c:pt idx="528">
+                  <c:v>43430</c:v>
+                </c:pt>
+                <c:pt idx="529">
+                  <c:v>43427</c:v>
+                </c:pt>
+                <c:pt idx="530">
+                  <c:v>43425</c:v>
+                </c:pt>
+                <c:pt idx="531">
+                  <c:v>43424</c:v>
+                </c:pt>
+                <c:pt idx="532">
+                  <c:v>43423</c:v>
+                </c:pt>
+                <c:pt idx="533">
+                  <c:v>43420</c:v>
+                </c:pt>
+                <c:pt idx="534">
+                  <c:v>43419</c:v>
+                </c:pt>
+                <c:pt idx="535">
+                  <c:v>43418</c:v>
+                </c:pt>
+                <c:pt idx="536">
+                  <c:v>43417</c:v>
+                </c:pt>
+                <c:pt idx="537">
+                  <c:v>43416</c:v>
+                </c:pt>
+                <c:pt idx="538">
+                  <c:v>43413</c:v>
+                </c:pt>
+                <c:pt idx="539">
+                  <c:v>43412</c:v>
+                </c:pt>
+                <c:pt idx="540">
+                  <c:v>43411</c:v>
+                </c:pt>
+                <c:pt idx="541">
+                  <c:v>43410</c:v>
+                </c:pt>
+                <c:pt idx="542">
+                  <c:v>43409</c:v>
+                </c:pt>
+                <c:pt idx="543">
+                  <c:v>43406</c:v>
+                </c:pt>
+                <c:pt idx="544">
+                  <c:v>43405</c:v>
+                </c:pt>
+                <c:pt idx="545">
+                  <c:v>43404</c:v>
+                </c:pt>
+                <c:pt idx="546">
+                  <c:v>43403</c:v>
+                </c:pt>
+                <c:pt idx="547">
+                  <c:v>43402</c:v>
+                </c:pt>
+                <c:pt idx="548">
+                  <c:v>43399</c:v>
+                </c:pt>
+                <c:pt idx="549">
+                  <c:v>43398</c:v>
+                </c:pt>
+                <c:pt idx="550">
+                  <c:v>43397</c:v>
+                </c:pt>
+                <c:pt idx="551">
+                  <c:v>43396</c:v>
+                </c:pt>
+                <c:pt idx="552">
+                  <c:v>43395</c:v>
+                </c:pt>
+                <c:pt idx="553">
+                  <c:v>43392</c:v>
+                </c:pt>
+                <c:pt idx="554">
+                  <c:v>43391</c:v>
+                </c:pt>
+                <c:pt idx="555">
+                  <c:v>43390</c:v>
+                </c:pt>
+                <c:pt idx="556">
+                  <c:v>43389</c:v>
+                </c:pt>
+                <c:pt idx="557">
+                  <c:v>43388</c:v>
+                </c:pt>
+                <c:pt idx="558">
+                  <c:v>43385</c:v>
+                </c:pt>
+                <c:pt idx="559">
+                  <c:v>43384</c:v>
+                </c:pt>
+                <c:pt idx="560">
+                  <c:v>43383</c:v>
+                </c:pt>
+                <c:pt idx="561">
+                  <c:v>43382</c:v>
+                </c:pt>
+                <c:pt idx="562">
+                  <c:v>43381</c:v>
+                </c:pt>
+                <c:pt idx="563">
+                  <c:v>43378</c:v>
+                </c:pt>
+                <c:pt idx="564">
+                  <c:v>43377</c:v>
+                </c:pt>
+                <c:pt idx="565">
+                  <c:v>43376</c:v>
+                </c:pt>
+                <c:pt idx="566">
+                  <c:v>43375</c:v>
+                </c:pt>
+                <c:pt idx="567">
+                  <c:v>43374</c:v>
+                </c:pt>
+                <c:pt idx="568">
+                  <c:v>43371</c:v>
+                </c:pt>
+                <c:pt idx="569">
+                  <c:v>43370</c:v>
+                </c:pt>
+                <c:pt idx="570">
+                  <c:v>43369</c:v>
+                </c:pt>
+                <c:pt idx="571">
+                  <c:v>43368</c:v>
+                </c:pt>
+                <c:pt idx="572">
+                  <c:v>43367</c:v>
+                </c:pt>
+                <c:pt idx="573">
+                  <c:v>43364</c:v>
+                </c:pt>
+                <c:pt idx="574">
+                  <c:v>43363</c:v>
+                </c:pt>
+                <c:pt idx="575">
+                  <c:v>43362</c:v>
+                </c:pt>
+                <c:pt idx="576">
+                  <c:v>43361</c:v>
+                </c:pt>
+                <c:pt idx="577">
+                  <c:v>43360</c:v>
+                </c:pt>
+                <c:pt idx="578">
+                  <c:v>43357</c:v>
+                </c:pt>
+                <c:pt idx="579">
+                  <c:v>43356</c:v>
+                </c:pt>
+                <c:pt idx="580">
+                  <c:v>43355</c:v>
+                </c:pt>
+                <c:pt idx="581">
+                  <c:v>43354</c:v>
+                </c:pt>
+                <c:pt idx="582">
+                  <c:v>43353</c:v>
+                </c:pt>
+                <c:pt idx="583">
+                  <c:v>43350</c:v>
+                </c:pt>
+                <c:pt idx="584">
+                  <c:v>43349</c:v>
+                </c:pt>
+                <c:pt idx="585">
+                  <c:v>43348</c:v>
+                </c:pt>
+                <c:pt idx="586">
+                  <c:v>43347</c:v>
+                </c:pt>
+                <c:pt idx="587">
+                  <c:v>43343</c:v>
+                </c:pt>
+                <c:pt idx="588">
+                  <c:v>43342</c:v>
+                </c:pt>
+                <c:pt idx="589">
+                  <c:v>43341</c:v>
+                </c:pt>
+                <c:pt idx="590">
+                  <c:v>43340</c:v>
+                </c:pt>
+                <c:pt idx="591">
+                  <c:v>43339</c:v>
+                </c:pt>
+                <c:pt idx="592">
+                  <c:v>43336</c:v>
+                </c:pt>
+                <c:pt idx="593">
+                  <c:v>43335</c:v>
+                </c:pt>
+                <c:pt idx="594">
+                  <c:v>43334</c:v>
+                </c:pt>
+                <c:pt idx="595">
+                  <c:v>43333</c:v>
+                </c:pt>
+                <c:pt idx="596">
+                  <c:v>43332</c:v>
+                </c:pt>
+                <c:pt idx="597">
+                  <c:v>43329</c:v>
+                </c:pt>
+                <c:pt idx="598">
+                  <c:v>43328</c:v>
+                </c:pt>
+                <c:pt idx="599">
+                  <c:v>43327</c:v>
+                </c:pt>
+                <c:pt idx="600">
+                  <c:v>43326</c:v>
+                </c:pt>
+                <c:pt idx="601">
+                  <c:v>43325</c:v>
+                </c:pt>
+                <c:pt idx="602">
+                  <c:v>43322</c:v>
+                </c:pt>
+                <c:pt idx="603">
+                  <c:v>43321</c:v>
+                </c:pt>
+                <c:pt idx="604">
+                  <c:v>43320</c:v>
+                </c:pt>
+                <c:pt idx="605">
+                  <c:v>43319</c:v>
+                </c:pt>
+                <c:pt idx="606">
+                  <c:v>43318</c:v>
+                </c:pt>
+                <c:pt idx="607">
+                  <c:v>43315</c:v>
+                </c:pt>
+                <c:pt idx="608">
+                  <c:v>43314</c:v>
+                </c:pt>
+                <c:pt idx="609">
+                  <c:v>43313</c:v>
+                </c:pt>
+                <c:pt idx="610">
+                  <c:v>43312</c:v>
+                </c:pt>
+                <c:pt idx="611">
+                  <c:v>43311</c:v>
+                </c:pt>
+                <c:pt idx="612">
+                  <c:v>43308</c:v>
+                </c:pt>
+                <c:pt idx="613">
+                  <c:v>43307</c:v>
+                </c:pt>
+                <c:pt idx="614">
+                  <c:v>43306</c:v>
+                </c:pt>
+                <c:pt idx="615">
+                  <c:v>43305</c:v>
+                </c:pt>
+                <c:pt idx="616">
+                  <c:v>43304</c:v>
+                </c:pt>
+                <c:pt idx="617">
+                  <c:v>43301</c:v>
+                </c:pt>
+                <c:pt idx="618">
+                  <c:v>43300</c:v>
+                </c:pt>
+                <c:pt idx="619">
+                  <c:v>43299</c:v>
+                </c:pt>
+                <c:pt idx="620">
+                  <c:v>43298</c:v>
+                </c:pt>
+                <c:pt idx="621">
+                  <c:v>43297</c:v>
+                </c:pt>
+                <c:pt idx="622">
+                  <c:v>43294</c:v>
+                </c:pt>
+                <c:pt idx="623">
+                  <c:v>43293</c:v>
+                </c:pt>
+                <c:pt idx="624">
+                  <c:v>43292</c:v>
+                </c:pt>
+                <c:pt idx="625">
+                  <c:v>43291</c:v>
+                </c:pt>
+                <c:pt idx="626">
+                  <c:v>43290</c:v>
+                </c:pt>
+                <c:pt idx="627">
+                  <c:v>43287</c:v>
+                </c:pt>
+                <c:pt idx="628">
+                  <c:v>43286</c:v>
+                </c:pt>
+                <c:pt idx="629">
+                  <c:v>43284</c:v>
+                </c:pt>
+                <c:pt idx="630">
+                  <c:v>43283</c:v>
+                </c:pt>
+                <c:pt idx="631">
+                  <c:v>43280</c:v>
+                </c:pt>
+                <c:pt idx="632">
+                  <c:v>43279</c:v>
+                </c:pt>
+                <c:pt idx="633">
+                  <c:v>43278</c:v>
+                </c:pt>
+                <c:pt idx="634">
+                  <c:v>43277</c:v>
+                </c:pt>
+                <c:pt idx="635">
+                  <c:v>43276</c:v>
+                </c:pt>
+                <c:pt idx="636">
+                  <c:v>43273</c:v>
+                </c:pt>
+                <c:pt idx="637">
+                  <c:v>43272</c:v>
+                </c:pt>
+                <c:pt idx="638">
+                  <c:v>43271</c:v>
+                </c:pt>
+                <c:pt idx="639">
+                  <c:v>43270</c:v>
+                </c:pt>
+                <c:pt idx="640">
+                  <c:v>43269</c:v>
+                </c:pt>
+                <c:pt idx="641">
+                  <c:v>43266</c:v>
+                </c:pt>
+                <c:pt idx="642">
+                  <c:v>43265</c:v>
+                </c:pt>
+                <c:pt idx="643">
+                  <c:v>43264</c:v>
+                </c:pt>
+                <c:pt idx="644">
+                  <c:v>43263</c:v>
+                </c:pt>
+                <c:pt idx="645">
+                  <c:v>43262</c:v>
+                </c:pt>
+                <c:pt idx="646">
+                  <c:v>43259</c:v>
+                </c:pt>
+                <c:pt idx="647">
+                  <c:v>43258</c:v>
+                </c:pt>
+                <c:pt idx="648">
+                  <c:v>43257</c:v>
+                </c:pt>
+                <c:pt idx="649">
+                  <c:v>43256</c:v>
+                </c:pt>
+                <c:pt idx="650">
+                  <c:v>43255</c:v>
+                </c:pt>
+                <c:pt idx="651">
+                  <c:v>43252</c:v>
+                </c:pt>
+                <c:pt idx="652">
+                  <c:v>43251</c:v>
+                </c:pt>
+                <c:pt idx="653">
+                  <c:v>43250</c:v>
+                </c:pt>
+                <c:pt idx="654">
+                  <c:v>43249</c:v>
+                </c:pt>
+                <c:pt idx="655">
+                  <c:v>43245</c:v>
+                </c:pt>
+                <c:pt idx="656">
+                  <c:v>43244</c:v>
+                </c:pt>
+                <c:pt idx="657">
+                  <c:v>43243</c:v>
+                </c:pt>
+                <c:pt idx="658">
+                  <c:v>43242</c:v>
+                </c:pt>
+                <c:pt idx="659">
+                  <c:v>43241</c:v>
+                </c:pt>
+                <c:pt idx="660">
+                  <c:v>43238</c:v>
+                </c:pt>
+                <c:pt idx="661">
+                  <c:v>43237</c:v>
+                </c:pt>
+                <c:pt idx="662">
+                  <c:v>43236</c:v>
+                </c:pt>
+                <c:pt idx="663">
+                  <c:v>43235</c:v>
+                </c:pt>
+                <c:pt idx="664">
+                  <c:v>43234</c:v>
+                </c:pt>
+                <c:pt idx="665">
+                  <c:v>43231</c:v>
+                </c:pt>
+                <c:pt idx="666">
+                  <c:v>43230</c:v>
+                </c:pt>
+                <c:pt idx="667">
+                  <c:v>43229</c:v>
+                </c:pt>
+                <c:pt idx="668">
+                  <c:v>43228</c:v>
+                </c:pt>
+                <c:pt idx="669">
+                  <c:v>43227</c:v>
+                </c:pt>
+                <c:pt idx="670">
+                  <c:v>43224</c:v>
+                </c:pt>
+                <c:pt idx="671">
+                  <c:v>43223</c:v>
+                </c:pt>
+                <c:pt idx="672">
+                  <c:v>43222</c:v>
+                </c:pt>
+                <c:pt idx="673">
+                  <c:v>43221</c:v>
+                </c:pt>
+                <c:pt idx="674">
+                  <c:v>43220</c:v>
+                </c:pt>
+                <c:pt idx="675">
+                  <c:v>43217</c:v>
+                </c:pt>
+                <c:pt idx="676">
+                  <c:v>43216</c:v>
+                </c:pt>
+                <c:pt idx="677">
+                  <c:v>43215</c:v>
+                </c:pt>
+                <c:pt idx="678">
+                  <c:v>43214</c:v>
+                </c:pt>
+                <c:pt idx="679">
+                  <c:v>43213</c:v>
+                </c:pt>
+                <c:pt idx="680">
+                  <c:v>43210</c:v>
+                </c:pt>
+                <c:pt idx="681">
+                  <c:v>43209</c:v>
+                </c:pt>
+                <c:pt idx="682">
+                  <c:v>43208</c:v>
+                </c:pt>
+                <c:pt idx="683">
+                  <c:v>43207</c:v>
+                </c:pt>
+                <c:pt idx="684">
+                  <c:v>43206</c:v>
+                </c:pt>
+                <c:pt idx="685">
+                  <c:v>43203</c:v>
+                </c:pt>
+                <c:pt idx="686">
+                  <c:v>43202</c:v>
+                </c:pt>
+                <c:pt idx="687">
+                  <c:v>43201</c:v>
+                </c:pt>
+                <c:pt idx="688">
+                  <c:v>43200</c:v>
+                </c:pt>
+                <c:pt idx="689">
+                  <c:v>43199</c:v>
+                </c:pt>
+                <c:pt idx="690">
+                  <c:v>43196</c:v>
+                </c:pt>
+                <c:pt idx="691">
+                  <c:v>43195</c:v>
+                </c:pt>
+                <c:pt idx="692">
+                  <c:v>43194</c:v>
+                </c:pt>
+                <c:pt idx="693">
+                  <c:v>43193</c:v>
+                </c:pt>
+                <c:pt idx="694">
+                  <c:v>43192</c:v>
+                </c:pt>
+                <c:pt idx="695">
+                  <c:v>43188</c:v>
+                </c:pt>
+                <c:pt idx="696">
+                  <c:v>43187</c:v>
+                </c:pt>
+                <c:pt idx="697">
+                  <c:v>43186</c:v>
+                </c:pt>
+                <c:pt idx="698">
+                  <c:v>43185</c:v>
+                </c:pt>
+                <c:pt idx="699">
+                  <c:v>43182</c:v>
+                </c:pt>
+                <c:pt idx="700">
+                  <c:v>43181</c:v>
+                </c:pt>
+                <c:pt idx="701">
+                  <c:v>43180</c:v>
+                </c:pt>
+                <c:pt idx="702">
+                  <c:v>43179</c:v>
+                </c:pt>
+                <c:pt idx="703">
+                  <c:v>43178</c:v>
+                </c:pt>
+                <c:pt idx="704">
+                  <c:v>43175</c:v>
+                </c:pt>
+                <c:pt idx="705">
+                  <c:v>43174</c:v>
+                </c:pt>
+                <c:pt idx="706">
+                  <c:v>43173</c:v>
+                </c:pt>
+                <c:pt idx="707">
+                  <c:v>43172</c:v>
+                </c:pt>
+                <c:pt idx="708">
+                  <c:v>43171</c:v>
+                </c:pt>
+                <c:pt idx="709">
+                  <c:v>43168</c:v>
+                </c:pt>
+                <c:pt idx="710">
+                  <c:v>43167</c:v>
+                </c:pt>
+                <c:pt idx="711">
+                  <c:v>43166</c:v>
+                </c:pt>
+                <c:pt idx="712">
+                  <c:v>43165</c:v>
+                </c:pt>
+                <c:pt idx="713">
+                  <c:v>43164</c:v>
+                </c:pt>
+                <c:pt idx="714">
+                  <c:v>43161</c:v>
+                </c:pt>
+                <c:pt idx="715">
+                  <c:v>43160</c:v>
+                </c:pt>
+                <c:pt idx="716">
+                  <c:v>43159</c:v>
+                </c:pt>
+                <c:pt idx="717">
+                  <c:v>43158</c:v>
+                </c:pt>
+                <c:pt idx="718">
+                  <c:v>43157</c:v>
+                </c:pt>
+                <c:pt idx="719">
+                  <c:v>43154</c:v>
+                </c:pt>
+                <c:pt idx="720">
+                  <c:v>43153</c:v>
+                </c:pt>
+                <c:pt idx="721">
+                  <c:v>43152</c:v>
+                </c:pt>
+                <c:pt idx="722">
+                  <c:v>43151</c:v>
+                </c:pt>
+                <c:pt idx="723">
+                  <c:v>43147</c:v>
+                </c:pt>
+                <c:pt idx="724">
+                  <c:v>43146</c:v>
+                </c:pt>
+                <c:pt idx="725">
+                  <c:v>43145</c:v>
+                </c:pt>
+                <c:pt idx="726">
+                  <c:v>43144</c:v>
+                </c:pt>
+                <c:pt idx="727">
+                  <c:v>43143</c:v>
+                </c:pt>
+                <c:pt idx="728">
+                  <c:v>43140</c:v>
+                </c:pt>
+                <c:pt idx="729">
+                  <c:v>43139</c:v>
+                </c:pt>
+                <c:pt idx="730">
+                  <c:v>43138</c:v>
+                </c:pt>
+                <c:pt idx="731">
+                  <c:v>43137</c:v>
+                </c:pt>
+                <c:pt idx="732">
+                  <c:v>43136</c:v>
+                </c:pt>
+                <c:pt idx="733">
+                  <c:v>43133</c:v>
+                </c:pt>
+                <c:pt idx="734">
+                  <c:v>43132</c:v>
+                </c:pt>
+                <c:pt idx="735">
+                  <c:v>43131</c:v>
+                </c:pt>
+                <c:pt idx="736">
+                  <c:v>43130</c:v>
+                </c:pt>
+                <c:pt idx="737">
+                  <c:v>43129</c:v>
+                </c:pt>
+                <c:pt idx="738">
+                  <c:v>43126</c:v>
+                </c:pt>
+                <c:pt idx="739">
+                  <c:v>43125</c:v>
+                </c:pt>
+                <c:pt idx="740">
+                  <c:v>43124</c:v>
+                </c:pt>
+                <c:pt idx="741">
+                  <c:v>43123</c:v>
+                </c:pt>
+                <c:pt idx="742">
+                  <c:v>43122</c:v>
+                </c:pt>
+                <c:pt idx="743">
+                  <c:v>43119</c:v>
+                </c:pt>
+                <c:pt idx="744">
+                  <c:v>43118</c:v>
+                </c:pt>
+                <c:pt idx="745">
+                  <c:v>43117</c:v>
+                </c:pt>
+                <c:pt idx="746">
+                  <c:v>43116</c:v>
+                </c:pt>
+                <c:pt idx="747">
+                  <c:v>43112</c:v>
+                </c:pt>
+                <c:pt idx="748">
+                  <c:v>43111</c:v>
+                </c:pt>
+                <c:pt idx="749">
+                  <c:v>43110</c:v>
+                </c:pt>
+                <c:pt idx="750">
+                  <c:v>43109</c:v>
+                </c:pt>
+                <c:pt idx="751">
+                  <c:v>43108</c:v>
+                </c:pt>
+                <c:pt idx="752">
+                  <c:v>43105</c:v>
+                </c:pt>
+                <c:pt idx="753">
+                  <c:v>43104</c:v>
+                </c:pt>
+                <c:pt idx="754">
+                  <c:v>43103</c:v>
+                </c:pt>
+                <c:pt idx="755">
+                  <c:v>43102</c:v>
+                </c:pt>
+              </c:numCache>
+            </c:numRef>
+          </c:cat>
+          <c:val>
+            <c:numRef>
+              <c:f>prices_sample!$F$2:$F$55406</c:f>
+              <c:numCache>
+                <c:formatCode>General</c:formatCode>
+                <c:ptCount val="756"/>
+                <c:pt idx="0">
+                  <c:v>235.22332763671801</c:v>
+                </c:pt>
+                <c:pt idx="1">
+                  <c:v>231.593338012695</c:v>
+                </c:pt>
+                <c:pt idx="2">
+                  <c:v>221.99667358398401</c:v>
+                </c:pt>
+                <c:pt idx="3">
+                  <c:v>221.22999572753901</c:v>
+                </c:pt>
+                <c:pt idx="4">
+                  <c:v>220.58999633789</c:v>
+                </c:pt>
+                <c:pt idx="5">
+                  <c:v>215.32666015625</c:v>
+                </c:pt>
+                <c:pt idx="6">
+                  <c:v>213.44667053222599</c:v>
+                </c:pt>
+                <c:pt idx="7">
+                  <c:v>216.61999511718699</c:v>
+                </c:pt>
+                <c:pt idx="8">
+                  <c:v>231.66667175292901</c:v>
+                </c:pt>
+                <c:pt idx="9">
+                  <c:v>218.63333129882801</c:v>
+                </c:pt>
+                <c:pt idx="10">
+                  <c:v>207.58999633789</c:v>
+                </c:pt>
+                <c:pt idx="11">
+                  <c:v>211.08332824707</c:v>
+                </c:pt>
+                <c:pt idx="12">
+                  <c:v>213.27667236328099</c:v>
+                </c:pt>
+                <c:pt idx="13">
+                  <c:v>203.33000183105401</c:v>
+                </c:pt>
+                <c:pt idx="14">
+                  <c:v>209.02333068847599</c:v>
+                </c:pt>
+                <c:pt idx="15">
+                  <c:v>201.49333190917901</c:v>
+                </c:pt>
+                <c:pt idx="16">
+                  <c:v>216.62666320800699</c:v>
+                </c:pt>
+                <c:pt idx="17">
+                  <c:v>213.919998168945</c:v>
+                </c:pt>
+                <c:pt idx="18">
+                  <c:v>199.67999267578099</c:v>
+                </c:pt>
+                <c:pt idx="19">
+                  <c:v>197.79333496093699</c:v>
+                </c:pt>
+                <c:pt idx="20">
+                  <c:v>189.60667419433599</c:v>
+                </c:pt>
+                <c:pt idx="21">
+                  <c:v>194.919998168945</c:v>
+                </c:pt>
+                <c:pt idx="22">
+                  <c:v>189.19999694824199</c:v>
+                </c:pt>
+                <c:pt idx="23">
+                  <c:v>195.253326416015</c:v>
+                </c:pt>
+                <c:pt idx="24">
+                  <c:v>191.33332824707</c:v>
+                </c:pt>
+                <c:pt idx="25">
+                  <c:v>185.12666320800699</c:v>
+                </c:pt>
+                <c:pt idx="26">
+                  <c:v>173.94999694824199</c:v>
+                </c:pt>
+                <c:pt idx="27">
+                  <c:v>163.20333862304599</c:v>
+                </c:pt>
+                <c:pt idx="28">
+                  <c:v>166.42333984375</c:v>
+                </c:pt>
+                <c:pt idx="29">
+                  <c:v>162.21333312988199</c:v>
+                </c:pt>
+                <c:pt idx="30">
+                  <c:v>147.20333862304599</c:v>
+                </c:pt>
+                <c:pt idx="31">
+                  <c:v>136.02999877929599</c:v>
+                </c:pt>
+                <c:pt idx="32">
+                  <c:v>136.16667175292901</c:v>
+                </c:pt>
+                <c:pt idx="33">
+                  <c:v>137.253326416015</c:v>
+                </c:pt>
+                <c:pt idx="34">
+                  <c:v>139.04333496093699</c:v>
+                </c:pt>
+                <c:pt idx="35">
+                  <c:v>136.78666687011699</c:v>
+                </c:pt>
+                <c:pt idx="36">
+                  <c:v>140.419998168945</c:v>
+                </c:pt>
+                <c:pt idx="37">
+                  <c:v>143.31666564941401</c:v>
+                </c:pt>
+                <c:pt idx="38">
+                  <c:v>146.02999877929599</c:v>
+                </c:pt>
+                <c:pt idx="39">
+                  <c:v>140.32666015625</c:v>
+                </c:pt>
+                <c:pt idx="40">
+                  <c:v>141.30000305175699</c:v>
+                </c:pt>
+                <c:pt idx="41">
+                  <c:v>133.503326416015</c:v>
+                </c:pt>
+                <c:pt idx="42">
+                  <c:v>129.34666442871</c:v>
+                </c:pt>
+                <c:pt idx="43">
+                  <c:v>136.94332885742099</c:v>
+                </c:pt>
+                <c:pt idx="44">
+                  <c:v>135.33999633789</c:v>
+                </c:pt>
+                <c:pt idx="45">
+                  <c:v>141.55999755859301</c:v>
+                </c:pt>
+                <c:pt idx="46">
+                  <c:v>140.093338012695</c:v>
+                </c:pt>
+                <c:pt idx="47">
+                  <c:v>140.21000671386699</c:v>
+                </c:pt>
+                <c:pt idx="48">
+                  <c:v>141.92999267578099</c:v>
+                </c:pt>
+                <c:pt idx="49">
+                  <c:v>140.88000488281199</c:v>
+                </c:pt>
+                <c:pt idx="50">
+                  <c:v>140.64666748046801</c:v>
+                </c:pt>
+                <c:pt idx="51">
+                  <c:v>143.61000061035099</c:v>
+                </c:pt>
+                <c:pt idx="52">
+                  <c:v>146.55667114257801</c:v>
+                </c:pt>
+                <c:pt idx="53">
+                  <c:v>149.62666320800699</c:v>
+                </c:pt>
+                <c:pt idx="54">
+                  <c:v>153.76666259765599</c:v>
+                </c:pt>
+                <c:pt idx="55">
+                  <c:v>148.88333129882801</c:v>
+                </c:pt>
+                <c:pt idx="56">
+                  <c:v>147.433334350585</c:v>
+                </c:pt>
+                <c:pt idx="57">
+                  <c:v>144.66667175292901</c:v>
+                </c:pt>
+                <c:pt idx="58">
+                  <c:v>141.97332763671801</c:v>
+                </c:pt>
+                <c:pt idx="59">
+                  <c:v>141.76666259765599</c:v>
+                </c:pt>
+                <c:pt idx="60">
+                  <c:v>137.99333190917901</c:v>
+                </c:pt>
+                <c:pt idx="61">
+                  <c:v>141.89332580566401</c:v>
+                </c:pt>
+                <c:pt idx="62">
+                  <c:v>138.36332702636699</c:v>
+                </c:pt>
+                <c:pt idx="63">
+                  <c:v>149.38667297363199</c:v>
+                </c:pt>
+                <c:pt idx="64">
+                  <c:v>143.003326416015</c:v>
+                </c:pt>
+                <c:pt idx="65">
+                  <c:v>139.69000244140599</c:v>
+                </c:pt>
+                <c:pt idx="66">
+                  <c:v>140.39999389648401</c:v>
+                </c:pt>
+                <c:pt idx="67">
+                  <c:v>135.77999877929599</c:v>
+                </c:pt>
+                <c:pt idx="68">
+                  <c:v>129.26333618164</c:v>
+                </c:pt>
+                <c:pt idx="69">
+                  <c:v>126.786666870117</c:v>
+                </c:pt>
+                <c:pt idx="70">
+                  <c:v>141.41000366210901</c:v>
+                </c:pt>
+                <c:pt idx="71">
+                  <c:v>149.79666137695301</c:v>
+                </c:pt>
+                <c:pt idx="72">
+                  <c:v>147.38333129882801</c:v>
+                </c:pt>
+                <c:pt idx="73">
+                  <c:v>141.14332580566401</c:v>
+                </c:pt>
+                <c:pt idx="74">
+                  <c:v>147.253326416015</c:v>
+                </c:pt>
+                <c:pt idx="75">
+                  <c:v>149.919998168945</c:v>
+                </c:pt>
+                <c:pt idx="76">
+                  <c:v>139.87333679199199</c:v>
+                </c:pt>
+                <c:pt idx="77">
+                  <c:v>124.23999786376901</c:v>
+                </c:pt>
+                <c:pt idx="78">
+                  <c:v>123.77999877929599</c:v>
+                </c:pt>
+                <c:pt idx="79">
+                  <c:v>122.0933303833</c:v>
+                </c:pt>
+                <c:pt idx="80">
+                  <c:v>110.06999969482401</c:v>
+                </c:pt>
+                <c:pt idx="81">
+                  <c:v>139.44000244140599</c:v>
+                </c:pt>
+                <c:pt idx="82">
+                  <c:v>135.66667175292901</c:v>
+                </c:pt>
+                <c:pt idx="83">
+                  <c:v>149.12333679199199</c:v>
+                </c:pt>
+                <c:pt idx="84">
+                  <c:v>158.350006103515</c:v>
+                </c:pt>
+                <c:pt idx="85">
+                  <c:v>166.106674194335</c:v>
+                </c:pt>
+                <c:pt idx="86">
+                  <c:v>147.55999755859301</c:v>
+                </c:pt>
+                <c:pt idx="87">
+                  <c:v>149.25</c:v>
+                </c:pt>
+                <c:pt idx="88">
+                  <c:v>143.544662475585</c:v>
+                </c:pt>
+                <c:pt idx="89">
+                  <c:v>134.88932800292901</c:v>
+                </c:pt>
+                <c:pt idx="90">
+                  <c:v>134.27999877929599</c:v>
+                </c:pt>
+                <c:pt idx="91">
+                  <c:v>136.66532897949199</c:v>
+                </c:pt>
+                <c:pt idx="92">
+                  <c:v>133.45533752441401</c:v>
+                </c:pt>
+                <c:pt idx="93">
+                  <c:v>125.23533630371</c:v>
+                </c:pt>
+                <c:pt idx="94">
+                  <c:v>125.80599975585901</c:v>
+                </c:pt>
+                <c:pt idx="95">
+                  <c:v>122.375999450683</c:v>
+                </c:pt>
+                <c:pt idx="96">
+                  <c:v>110.04733276367099</c:v>
+                </c:pt>
+                <c:pt idx="97">
+                  <c:v>108.06666564941401</c:v>
+                </c:pt>
+                <c:pt idx="98">
+                  <c:v>103.650665283203</c:v>
+                </c:pt>
+                <c:pt idx="99">
+                  <c:v>91.625999450683594</c:v>
+                </c:pt>
+                <c:pt idx="100">
+                  <c:v>94.571334838867202</c:v>
+                </c:pt>
+                <c:pt idx="101">
+                  <c:v>96.847335815429602</c:v>
+                </c:pt>
+                <c:pt idx="102">
+                  <c:v>99.305335998535099</c:v>
+                </c:pt>
+                <c:pt idx="103">
+                  <c:v>99.001335144042898</c:v>
+                </c:pt>
+                <c:pt idx="104">
+                  <c:v>99.133331298828097</c:v>
+                </c:pt>
+                <c:pt idx="105">
+                  <c:v>99</c:v>
+                </c:pt>
+                <c:pt idx="106">
+                  <c:v>95.384002685546804</c:v>
+                </c:pt>
+                <c:pt idx="107">
+                  <c:v>99.166000366210895</c:v>
+                </c:pt>
+                <c:pt idx="108">
+                  <c:v>99.940666198730398</c:v>
+                </c:pt>
+                <c:pt idx="109">
+                  <c:v>98.432670593261705</c:v>
+                </c:pt>
+                <c:pt idx="110">
+                  <c:v>102.639999389648</c:v>
+                </c:pt>
+                <c:pt idx="111">
+                  <c:v>94.466667175292898</c:v>
+                </c:pt>
+                <c:pt idx="112">
+                  <c:v>100.87133026123</c:v>
+                </c:pt>
+                <c:pt idx="113">
+                  <c:v>106.15533447265599</c:v>
+                </c:pt>
+                <c:pt idx="114">
+                  <c:v>104.557334899902</c:v>
+                </c:pt>
+                <c:pt idx="115">
+                  <c:v>109.533332824707</c:v>
+                </c:pt>
+                <c:pt idx="116">
+                  <c:v>100.05599975585901</c:v>
+                </c:pt>
+                <c:pt idx="117">
+                  <c:v>100.042663574218</c:v>
+                </c:pt>
+                <c:pt idx="118">
+                  <c:v>103.067329406738</c:v>
+                </c:pt>
+                <c:pt idx="119">
+                  <c:v>101.120002746582</c:v>
+                </c:pt>
+                <c:pt idx="120">
+                  <c:v>99.804000854492202</c:v>
+                </c:pt>
+                <c:pt idx="121">
+                  <c:v>102.976669311523</c:v>
+                </c:pt>
+                <c:pt idx="122">
+                  <c:v>92.952003479003906</c:v>
+                </c:pt>
+                <c:pt idx="123">
+                  <c:v>91.058670043945298</c:v>
+                </c:pt>
+                <c:pt idx="124">
+                  <c:v>92.657333374023395</c:v>
+                </c:pt>
+                <c:pt idx="125">
+                  <c:v>91.438667297363196</c:v>
+                </c:pt>
+                <c:pt idx="126">
+                  <c:v>1208.66003417968</c:v>
+                </c:pt>
+                <c:pt idx="127">
+                  <c:v>1119.63000488281</c:v>
+                </c:pt>
+                <c:pt idx="128">
+                  <c:v>1079.81005859375</c:v>
+                </c:pt>
+                <c:pt idx="129">
+                  <c:v>1009.34997558593</c:v>
+                </c:pt>
+                <c:pt idx="130">
+                  <c:v>959.739990234375</c:v>
+                </c:pt>
+                <c:pt idx="131">
+                  <c:v>985.97998046875</c:v>
+                </c:pt>
+                <c:pt idx="132">
+                  <c:v>960.84997558593705</c:v>
+                </c:pt>
+                <c:pt idx="133">
+                  <c:v>1001.78002929687</c:v>
+                </c:pt>
+                <c:pt idx="134">
+                  <c:v>994.32000732421795</c:v>
+                </c:pt>
+                <c:pt idx="135">
+                  <c:v>1000.90002441406</c:v>
+                </c:pt>
+                <c:pt idx="136">
+                  <c:v>1003.96002197265</c:v>
+                </c:pt>
+                <c:pt idx="137">
+                  <c:v>991.78997802734295</c:v>
+                </c:pt>
+                <c:pt idx="138">
+                  <c:v>982.13000488281205</c:v>
+                </c:pt>
+                <c:pt idx="139">
+                  <c:v>990.90002441406205</c:v>
+                </c:pt>
+                <c:pt idx="140">
+                  <c:v>935.280029296875</c:v>
+                </c:pt>
+                <c:pt idx="141">
+                  <c:v>972.84002685546795</c:v>
+                </c:pt>
+                <c:pt idx="142">
+                  <c:v>1025.05004882812</c:v>
+                </c:pt>
+                <c:pt idx="143">
+                  <c:v>940.66998291015602</c:v>
+                </c:pt>
+                <c:pt idx="144">
+                  <c:v>949.91998291015602</c:v>
+                </c:pt>
+                <c:pt idx="145">
+                  <c:v>885.65997314453102</c:v>
+                </c:pt>
+                <c:pt idx="146">
+                  <c:v>864.38000488281205</c:v>
+                </c:pt>
+                <c:pt idx="147">
+                  <c:v>882.96002197265602</c:v>
+                </c:pt>
+                <c:pt idx="148">
+                  <c:v>881.55999755859295</c:v>
+                </c:pt>
+                <c:pt idx="149">
+                  <c:v>898.09997558593705</c:v>
+                </c:pt>
+                <c:pt idx="150">
+                  <c:v>835</c:v>
+                </c:pt>
+                <c:pt idx="151">
+                  <c:v>805.80999755859295</c:v>
+                </c:pt>
+                <c:pt idx="152">
+                  <c:v>820.22998046875</c:v>
+                </c:pt>
+                <c:pt idx="153">
+                  <c:v>818.86999511718705</c:v>
+                </c:pt>
+                <c:pt idx="154">
+                  <c:v>816.88000488281205</c:v>
+                </c:pt>
+                <c:pt idx="155">
+                  <c:v>827.59997558593705</c:v>
+                </c:pt>
+                <c:pt idx="156">
+                  <c:v>815.55999755859295</c:v>
+                </c:pt>
+                <c:pt idx="157">
+                  <c:v>808.010009765625</c:v>
+                </c:pt>
+                <c:pt idx="158">
+                  <c:v>813.63000488281205</c:v>
+                </c:pt>
+                <c:pt idx="159">
+                  <c:v>799.16998291015602</c:v>
+                </c:pt>
+                <c:pt idx="160">
+                  <c:v>803.33001708984295</c:v>
+                </c:pt>
+                <c:pt idx="161">
+                  <c:v>790.96002197265602</c:v>
+                </c:pt>
+                <c:pt idx="162">
+                  <c:v>809.40997314453102</c:v>
+                </c:pt>
+                <c:pt idx="163">
+                  <c:v>811.28997802734295</c:v>
+                </c:pt>
+                <c:pt idx="164">
+                  <c:v>819.41998291015602</c:v>
+                </c:pt>
+                <c:pt idx="165">
+                  <c:v>780.03997802734295</c:v>
+                </c:pt>
+                <c:pt idx="166">
+                  <c:v>782.58001708984295</c:v>
+                </c:pt>
+                <c:pt idx="167">
+                  <c:v>768.21002197265602</c:v>
+                </c:pt>
+                <c:pt idx="168">
+                  <c:v>761.19000244140602</c:v>
+                </c:pt>
+                <c:pt idx="169">
+                  <c:v>701.32000732421795</c:v>
+                </c:pt>
+                <c:pt idx="170">
+                  <c:v>781.88000488281205</c:v>
+                </c:pt>
+                <c:pt idx="171">
+                  <c:v>800.510009765625</c:v>
+                </c:pt>
+                <c:pt idx="172">
+                  <c:v>769.11999511718705</c:v>
+                </c:pt>
+                <c:pt idx="173">
+                  <c:v>798.75</c:v>
+                </c:pt>
+                <c:pt idx="174">
+                  <c:v>725.15002441406205</c:v>
+                </c:pt>
+                <c:pt idx="175">
+                  <c:v>705.63000488281205</c:v>
+                </c:pt>
+                <c:pt idx="176">
+                  <c:v>732.10998535156205</c:v>
+                </c:pt>
+                <c:pt idx="177">
+                  <c:v>686.719970703125</c:v>
+                </c:pt>
+                <c:pt idx="178">
+                  <c:v>746.35998535156205</c:v>
+                </c:pt>
+                <c:pt idx="179">
+                  <c:v>753.89001464843705</c:v>
+                </c:pt>
+                <c:pt idx="180">
+                  <c:v>745.21002197265602</c:v>
+                </c:pt>
+                <c:pt idx="181">
+                  <c:v>729.83001708984295</c:v>
+                </c:pt>
+                <c:pt idx="182">
+                  <c:v>709.89001464843705</c:v>
+                </c:pt>
+                <c:pt idx="183">
+                  <c:v>650.95001220703102</c:v>
+                </c:pt>
+                <c:pt idx="184">
+                  <c:v>573</c:v>
+                </c:pt>
+                <c:pt idx="185">
+                  <c:v>548.84002685546795</c:v>
+                </c:pt>
+                <c:pt idx="186">
+                  <c:v>545.45001220703102</c:v>
+                </c:pt>
+                <c:pt idx="187">
+                  <c:v>516.239990234375</c:v>
+                </c:pt>
+                <c:pt idx="188">
+                  <c:v>480.010009765625</c:v>
+                </c:pt>
+                <c:pt idx="189">
+                  <c:v>454.47000122070301</c:v>
+                </c:pt>
+                <c:pt idx="190">
+                  <c:v>481.55999755859301</c:v>
+                </c:pt>
+                <c:pt idx="191">
+                  <c:v>524</c:v>
+                </c:pt>
+                <c:pt idx="192">
+                  <c:v>502.13000488281199</c:v>
+                </c:pt>
+                <c:pt idx="193">
+                  <c:v>514.35998535156205</c:v>
+                </c:pt>
+                <c:pt idx="194">
+                  <c:v>528.15997314453102</c:v>
+                </c:pt>
+                <c:pt idx="195">
+                  <c:v>539.25</c:v>
+                </c:pt>
+                <c:pt idx="196">
+                  <c:v>505</c:v>
+                </c:pt>
+                <c:pt idx="197">
+                  <c:v>434.29000854492102</c:v>
+                </c:pt>
+                <c:pt idx="198">
+                  <c:v>427.52999877929602</c:v>
+                </c:pt>
+                <c:pt idx="199">
+                  <c:v>427.64001464843699</c:v>
+                </c:pt>
+                <c:pt idx="200">
+                  <c:v>361.22000122070301</c:v>
+                </c:pt>
+                <c:pt idx="201">
+                  <c:v>430.20001220703102</c:v>
+                </c:pt>
+                <c:pt idx="202">
+                  <c:v>445.07000732421801</c:v>
+                </c:pt>
+                <c:pt idx="203">
+                  <c:v>546.61999511718705</c:v>
+                </c:pt>
+                <c:pt idx="204">
+                  <c:v>560.54998779296795</c:v>
+                </c:pt>
+                <c:pt idx="205">
+                  <c:v>634.22998046875</c:v>
+                </c:pt>
+                <c:pt idx="206">
+                  <c:v>645.33001708984295</c:v>
+                </c:pt>
+                <c:pt idx="207">
+                  <c:v>608</c:v>
+                </c:pt>
+                <c:pt idx="208">
+                  <c:v>703.47998046875</c:v>
+                </c:pt>
+                <c:pt idx="209">
+                  <c:v>724.53997802734295</c:v>
+                </c:pt>
+                <c:pt idx="210">
+                  <c:v>749.5</c:v>
+                </c:pt>
+                <c:pt idx="211">
+                  <c:v>745.510009765625</c:v>
+                </c:pt>
+                <c:pt idx="212">
+                  <c:v>743.61999511718705</c:v>
+                </c:pt>
+                <c:pt idx="213">
+                  <c:v>667.989990234375</c:v>
+                </c:pt>
+                <c:pt idx="214">
+                  <c:v>679</c:v>
+                </c:pt>
+                <c:pt idx="215">
+                  <c:v>778.79998779296795</c:v>
+                </c:pt>
+                <c:pt idx="216">
+                  <c:v>799.90997314453102</c:v>
+                </c:pt>
+                <c:pt idx="217">
+                  <c:v>833.78997802734295</c:v>
+                </c:pt>
+                <c:pt idx="218">
+                  <c:v>901</c:v>
+                </c:pt>
+                <c:pt idx="219">
+                  <c:v>899.40997314453102</c:v>
+                </c:pt>
+                <c:pt idx="220">
+                  <c:v>917.41998291015602</c:v>
+                </c:pt>
+                <c:pt idx="221">
+                  <c:v>858.40002441406205</c:v>
+                </c:pt>
+                <c:pt idx="222">
+                  <c:v>800.030029296875</c:v>
+                </c:pt>
+                <c:pt idx="223">
+                  <c:v>804</c:v>
+                </c:pt>
+                <c:pt idx="224">
+                  <c:v>767.28997802734295</c:v>
+                </c:pt>
+                <c:pt idx="225">
+                  <c:v>774.38000488281205</c:v>
+                </c:pt>
+                <c:pt idx="226">
+                  <c:v>771.280029296875</c:v>
+                </c:pt>
+                <c:pt idx="227">
+                  <c:v>748.07000732421795</c:v>
+                </c:pt>
+                <c:pt idx="228">
+                  <c:v>748.96002197265602</c:v>
+                </c:pt>
+                <c:pt idx="229">
+                  <c:v>734.70001220703102</c:v>
+                </c:pt>
+                <c:pt idx="230">
+                  <c:v>887.05999755859295</c:v>
+                </c:pt>
+                <c:pt idx="231">
+                  <c:v>780</c:v>
+                </c:pt>
+                <c:pt idx="232">
+                  <c:v>650.57000732421795</c:v>
+                </c:pt>
+                <c:pt idx="233">
+                  <c:v>640.80999755859295</c:v>
+                </c:pt>
+                <c:pt idx="234">
+                  <c:v>580.989990234375</c:v>
+                </c:pt>
+                <c:pt idx="235">
+                  <c:v>566.90002441406205</c:v>
+                </c:pt>
+                <c:pt idx="236">
+                  <c:v>558.02001953125</c:v>
+                </c:pt>
+                <c:pt idx="237">
+                  <c:v>564.82000732421795</c:v>
+                </c:pt>
+                <c:pt idx="238">
+                  <c:v>572.20001220703102</c:v>
+                </c:pt>
+                <c:pt idx="239">
+                  <c:v>569.55999755859295</c:v>
+                </c:pt>
+                <c:pt idx="240">
+                  <c:v>547.20001220703102</c:v>
+                </c:pt>
+                <c:pt idx="241">
+                  <c:v>510.5</c:v>
+                </c:pt>
+                <c:pt idx="242">
+                  <c:v>513.489990234375</c:v>
+                </c:pt>
+                <c:pt idx="243">
+                  <c:v>518.5</c:v>
+                </c:pt>
+                <c:pt idx="244">
+                  <c:v>537.91998291015602</c:v>
+                </c:pt>
+                <c:pt idx="245">
+                  <c:v>524.85998535156205</c:v>
+                </c:pt>
+                <c:pt idx="246">
+                  <c:v>478.14999389648398</c:v>
+                </c:pt>
+                <c:pt idx="247">
+                  <c:v>481.33999633789</c:v>
+                </c:pt>
+                <c:pt idx="248">
+                  <c:v>492.14001464843699</c:v>
+                </c:pt>
+                <c:pt idx="249">
+                  <c:v>469.05999755859301</c:v>
+                </c:pt>
+                <c:pt idx="250">
+                  <c:v>451.54000854492102</c:v>
+                </c:pt>
+                <c:pt idx="251">
+                  <c:v>443.010009765625</c:v>
+                </c:pt>
+                <c:pt idx="252">
+                  <c:v>430.260009765625</c:v>
+                </c:pt>
+                <c:pt idx="253">
+                  <c:v>418.329986572265</c:v>
+                </c:pt>
+                <c:pt idx="254">
+                  <c:v>414.70001220703102</c:v>
+                </c:pt>
+                <c:pt idx="255">
+                  <c:v>430.38000488281199</c:v>
+                </c:pt>
+                <c:pt idx="256">
+                  <c:v>430.94000244140602</c:v>
+                </c:pt>
+                <c:pt idx="257">
+                  <c:v>425.25</c:v>
+                </c:pt>
+                <c:pt idx="258">
+                  <c:v>419.22000122070301</c:v>
+                </c:pt>
+                <c:pt idx="259">
+                  <c:v>405.58999633789</c:v>
+                </c:pt>
+                <c:pt idx="260">
+                  <c:v>404.04000854492102</c:v>
+                </c:pt>
+                <c:pt idx="261">
+                  <c:v>393.14999389648398</c:v>
+                </c:pt>
+                <c:pt idx="262">
+                  <c:v>378.989990234375</c:v>
+                </c:pt>
+                <c:pt idx="263">
+                  <c:v>381.5</c:v>
+                </c:pt>
+                <c:pt idx="264">
+                  <c:v>358.39001464843699</c:v>
+                </c:pt>
+                <c:pt idx="265">
+                  <c:v>359.67999267578102</c:v>
+                </c:pt>
+                <c:pt idx="266">
+                  <c:v>352.70001220703102</c:v>
+                </c:pt>
+                <c:pt idx="267">
+                  <c:v>348.83999633789</c:v>
+                </c:pt>
+                <c:pt idx="268">
+                  <c:v>339.52999877929602</c:v>
+                </c:pt>
+                <c:pt idx="269">
+                  <c:v>335.89001464843699</c:v>
+                </c:pt>
+                <c:pt idx="270">
+                  <c:v>330.36999511718699</c:v>
+                </c:pt>
+                <c:pt idx="271">
+                  <c:v>333.02999877929602</c:v>
+                </c:pt>
+                <c:pt idx="272">
+                  <c:v>336.20001220703102</c:v>
+                </c:pt>
+                <c:pt idx="273">
+                  <c:v>334.86999511718699</c:v>
+                </c:pt>
+                <c:pt idx="274">
+                  <c:v>329.94000244140602</c:v>
+                </c:pt>
+                <c:pt idx="275">
+                  <c:v>331.29000854492102</c:v>
+                </c:pt>
+                <c:pt idx="276">
+                  <c:v>328.92001342773398</c:v>
+                </c:pt>
+                <c:pt idx="277">
+                  <c:v>336.33999633789</c:v>
+                </c:pt>
+                <c:pt idx="278">
+                  <c:v>333.04000854492102</c:v>
+                </c:pt>
+                <c:pt idx="279">
+                  <c:v>354.829986572265</c:v>
+                </c:pt>
+                <c:pt idx="280">
+                  <c:v>352.22000122070301</c:v>
+                </c:pt>
+                <c:pt idx="281">
+                  <c:v>359.51998901367102</c:v>
+                </c:pt>
+                <c:pt idx="282">
+                  <c:v>349.989990234375</c:v>
+                </c:pt>
+                <c:pt idx="283">
+                  <c:v>352.17001342773398</c:v>
+                </c:pt>
+                <c:pt idx="284">
+                  <c:v>349.350006103515</c:v>
+                </c:pt>
+                <c:pt idx="285">
+                  <c:v>346.10998535156199</c:v>
+                </c:pt>
+                <c:pt idx="286">
+                  <c:v>349.92999267578102</c:v>
+                </c:pt>
+                <c:pt idx="287">
+                  <c:v>345.08999633789</c:v>
+                </c:pt>
+                <c:pt idx="288">
+                  <c:v>337.14001464843699</c:v>
+                </c:pt>
+                <c:pt idx="289">
+                  <c:v>335.54000854492102</c:v>
+                </c:pt>
+                <c:pt idx="290">
+                  <c:v>326.579986572265</c:v>
+                </c:pt>
+                <c:pt idx="291">
+                  <c:v>317.22000122070301</c:v>
+                </c:pt>
+                <c:pt idx="292">
+                  <c:v>317.47000122070301</c:v>
+                </c:pt>
+                <c:pt idx="293">
+                  <c:v>313.30999755859301</c:v>
+                </c:pt>
+                <c:pt idx="294">
+                  <c:v>314.92001342773398</c:v>
+                </c:pt>
+                <c:pt idx="295">
+                  <c:v>315.010009765625</c:v>
+                </c:pt>
+                <c:pt idx="296">
+                  <c:v>316.22000122070301</c:v>
+                </c:pt>
+                <c:pt idx="297">
+                  <c:v>327.70999145507801</c:v>
+                </c:pt>
+                <c:pt idx="298">
+                  <c:v>328.13000488281199</c:v>
+                </c:pt>
+                <c:pt idx="299">
+                  <c:v>299.67999267578102</c:v>
+                </c:pt>
+                <c:pt idx="300">
+                  <c:v>254.67999267578099</c:v>
+                </c:pt>
+                <c:pt idx="301">
+                  <c:v>255.58000183105401</c:v>
+                </c:pt>
+                <c:pt idx="302">
+                  <c:v>253.5</c:v>
+                </c:pt>
+                <c:pt idx="303">
+                  <c:v>256.95001220703102</c:v>
+                </c:pt>
+                <c:pt idx="304">
+                  <c:v>261.97000122070301</c:v>
+                </c:pt>
+                <c:pt idx="305">
+                  <c:v>259.75</c:v>
+                </c:pt>
+                <c:pt idx="306">
+                  <c:v>257.89001464843699</c:v>
+                </c:pt>
+                <c:pt idx="307">
+                  <c:v>256.95999145507801</c:v>
+                </c:pt>
+                <c:pt idx="308">
+                  <c:v>247.88999938964801</c:v>
+                </c:pt>
+                <c:pt idx="309">
+                  <c:v>244.74000549316401</c:v>
+                </c:pt>
+                <c:pt idx="310">
+                  <c:v>244.52999877929599</c:v>
+                </c:pt>
+                <c:pt idx="311">
+                  <c:v>240.05000305175699</c:v>
+                </c:pt>
+                <c:pt idx="312">
+                  <c:v>237.72000122070301</c:v>
+                </c:pt>
+                <c:pt idx="313">
+                  <c:v>231.42999267578099</c:v>
+                </c:pt>
+                <c:pt idx="314">
+                  <c:v>233.02999877929599</c:v>
+                </c:pt>
+                <c:pt idx="315">
+                  <c:v>243.13000488281199</c:v>
+                </c:pt>
+                <c:pt idx="316">
+                  <c:v>244.69000244140599</c:v>
+                </c:pt>
+                <c:pt idx="317">
+                  <c:v>240.86999511718699</c:v>
+                </c:pt>
+                <c:pt idx="318">
+                  <c:v>242.13000488281199</c:v>
+                </c:pt>
+                <c:pt idx="319">
+                  <c:v>242.55999755859301</c:v>
+                </c:pt>
+                <c:pt idx="320">
+                  <c:v>228.69999694824199</c:v>
+                </c:pt>
+                <c:pt idx="321">
+                  <c:v>223.21000671386699</c:v>
+                </c:pt>
+                <c:pt idx="322">
+                  <c:v>241.22999572753901</c:v>
+                </c:pt>
+                <c:pt idx="323">
+                  <c:v>240.61999511718699</c:v>
+                </c:pt>
+                <c:pt idx="324">
+                  <c:v>246.600006103515</c:v>
+                </c:pt>
+                <c:pt idx="325">
+                  <c:v>243.49000549316401</c:v>
+                </c:pt>
+                <c:pt idx="326">
+                  <c:v>244.78999328613199</c:v>
+                </c:pt>
+                <c:pt idx="327">
+                  <c:v>242.80999755859301</c:v>
+                </c:pt>
+                <c:pt idx="328">
+                  <c:v>245.19999694824199</c:v>
+                </c:pt>
+                <c:pt idx="329">
+                  <c:v>245.86999511718699</c:v>
+                </c:pt>
+                <c:pt idx="330">
+                  <c:v>247.100006103515</c:v>
+                </c:pt>
+                <c:pt idx="331">
+                  <c:v>235.53999328613199</c:v>
+                </c:pt>
+                <c:pt idx="332">
+                  <c:v>231.78999328613199</c:v>
+                </c:pt>
+                <c:pt idx="333">
+                  <c:v>227.44999694824199</c:v>
+                </c:pt>
+                <c:pt idx="334">
+                  <c:v>229.58000183105401</c:v>
+                </c:pt>
+                <c:pt idx="335">
+                  <c:v>220.67999267578099</c:v>
+                </c:pt>
+                <c:pt idx="336">
+                  <c:v>225.00999450683599</c:v>
+                </c:pt>
+                <c:pt idx="337">
+                  <c:v>225.61000061035099</c:v>
+                </c:pt>
+                <c:pt idx="338">
+                  <c:v>221.71000671386699</c:v>
+                </c:pt>
+                <c:pt idx="339">
+                  <c:v>215.58999633789</c:v>
+                </c:pt>
+                <c:pt idx="340">
+                  <c:v>214.08000183105401</c:v>
+                </c:pt>
+                <c:pt idx="341">
+                  <c:v>215</c:v>
+                </c:pt>
+                <c:pt idx="342">
+                  <c:v>211.39999389648401</c:v>
+                </c:pt>
+                <c:pt idx="343">
+                  <c:v>222.14999389648401</c:v>
+                </c:pt>
+                <c:pt idx="344">
+                  <c:v>220.83000183105401</c:v>
+                </c:pt>
+                <c:pt idx="345">
+                  <c:v>225.86000061035099</c:v>
+                </c:pt>
+                <c:pt idx="346">
+                  <c:v>226.83000183105401</c:v>
+                </c:pt>
+                <c:pt idx="347">
+                  <c:v>219.94000244140599</c:v>
+                </c:pt>
+                <c:pt idx="348">
+                  <c:v>215.63999938964801</c:v>
+                </c:pt>
+                <c:pt idx="349">
+                  <c:v>219.61999511718699</c:v>
+                </c:pt>
+                <c:pt idx="350">
+                  <c:v>235</c:v>
+                </c:pt>
+                <c:pt idx="351">
+                  <c:v>229.00999450683599</c:v>
+                </c:pt>
+                <c:pt idx="352">
+                  <c:v>235.00999450683599</c:v>
+                </c:pt>
+                <c:pt idx="353">
+                  <c:v>238.30000305175699</c:v>
+                </c:pt>
+                <c:pt idx="354">
+                  <c:v>233.419998168945</c:v>
+                </c:pt>
+                <c:pt idx="355">
+                  <c:v>230.75</c:v>
+                </c:pt>
+                <c:pt idx="356">
+                  <c:v>228.32000732421801</c:v>
+                </c:pt>
+                <c:pt idx="357">
+                  <c:v>234.33999633789</c:v>
+                </c:pt>
+                <c:pt idx="358">
+                  <c:v>233.850006103515</c:v>
+                </c:pt>
+                <c:pt idx="359">
+                  <c:v>241.61000061035099</c:v>
+                </c:pt>
+                <c:pt idx="360">
+                  <c:v>242.25999450683599</c:v>
+                </c:pt>
+                <c:pt idx="361">
+                  <c:v>235.77000427246</c:v>
+                </c:pt>
+                <c:pt idx="362">
+                  <c:v>228.03999328613199</c:v>
+                </c:pt>
+                <c:pt idx="363">
+                  <c:v>228.82000732421801</c:v>
+                </c:pt>
+                <c:pt idx="364">
+                  <c:v>264.88000488281199</c:v>
+                </c:pt>
+                <c:pt idx="365">
+                  <c:v>260.17001342773398</c:v>
+                </c:pt>
+                <c:pt idx="366">
+                  <c:v>255.67999267578099</c:v>
+                </c:pt>
+                <c:pt idx="367">
+                  <c:v>258.17999267578102</c:v>
+                </c:pt>
+                <c:pt idx="368">
+                  <c:v>253.53999328613199</c:v>
+                </c:pt>
+                <c:pt idx="369">
+                  <c:v>254.86000061035099</c:v>
+                </c:pt>
+                <c:pt idx="370">
+                  <c:v>252.38000488281199</c:v>
+                </c:pt>
+                <c:pt idx="371">
+                  <c:v>253.5</c:v>
+                </c:pt>
+                <c:pt idx="372">
+                  <c:v>245.08000183105401</c:v>
+                </c:pt>
+                <c:pt idx="373">
+                  <c:v>238.600006103515</c:v>
+                </c:pt>
+                <c:pt idx="374">
+                  <c:v>238.919998168945</c:v>
+                </c:pt>
+                <c:pt idx="375">
+                  <c:v>230.05999755859301</c:v>
+                </c:pt>
+                <c:pt idx="376">
+                  <c:v>230.33999633789</c:v>
+                </c:pt>
+                <c:pt idx="377">
+                  <c:v>233.100006103515</c:v>
+                </c:pt>
+                <c:pt idx="378">
+                  <c:v>234.89999389648401</c:v>
+                </c:pt>
+                <c:pt idx="379">
+                  <c:v>224.55000305175699</c:v>
+                </c:pt>
+                <c:pt idx="380">
+                  <c:v>227.169998168945</c:v>
+                </c:pt>
+                <c:pt idx="381">
+                  <c:v>223.46000671386699</c:v>
+                </c:pt>
+                <c:pt idx="382">
+                  <c:v>222.83999633789</c:v>
+                </c:pt>
+                <c:pt idx="383">
+                  <c:v>219.27000427246</c:v>
+                </c:pt>
+                <c:pt idx="384">
+                  <c:v>219.75999450683599</c:v>
+                </c:pt>
+                <c:pt idx="385">
+                  <c:v>223.63999938964801</c:v>
+                </c:pt>
+                <c:pt idx="386">
+                  <c:v>221.86000061035099</c:v>
+                </c:pt>
+                <c:pt idx="387">
+                  <c:v>219.61999511718699</c:v>
+                </c:pt>
+                <c:pt idx="388">
+                  <c:v>226.42999267578099</c:v>
+                </c:pt>
+                <c:pt idx="389">
+                  <c:v>224.74000549316401</c:v>
+                </c:pt>
+                <c:pt idx="390">
+                  <c:v>225.02999877929599</c:v>
+                </c:pt>
+                <c:pt idx="391">
+                  <c:v>214.919998168945</c:v>
+                </c:pt>
+                <c:pt idx="392">
+                  <c:v>213.91000366210901</c:v>
+                </c:pt>
+                <c:pt idx="393">
+                  <c:v>209.25999450683599</c:v>
+                </c:pt>
+                <c:pt idx="394">
+                  <c:v>217.100006103515</c:v>
+                </c:pt>
+                <c:pt idx="395">
+                  <c:v>212.88000488281199</c:v>
+                </c:pt>
+                <c:pt idx="396">
+                  <c:v>204.5</c:v>
+                </c:pt>
+                <c:pt idx="397">
+                  <c:v>205.94999694824199</c:v>
+                </c:pt>
+                <c:pt idx="398">
+                  <c:v>196.58999633789</c:v>
+                </c:pt>
+                <c:pt idx="399">
+                  <c:v>193.600006103515</c:v>
+                </c:pt>
+                <c:pt idx="400">
+                  <c:v>178.97000122070301</c:v>
+                </c:pt>
+                <c:pt idx="401">
+                  <c:v>185.16000366210901</c:v>
+                </c:pt>
+                <c:pt idx="402">
+                  <c:v>188.22000122070301</c:v>
+                </c:pt>
+                <c:pt idx="403">
+                  <c:v>189.86000061035099</c:v>
+                </c:pt>
+                <c:pt idx="404">
+                  <c:v>188.69999694824199</c:v>
+                </c:pt>
+                <c:pt idx="405">
+                  <c:v>190.63000488281199</c:v>
+                </c:pt>
+                <c:pt idx="406">
+                  <c:v>195.49000549316401</c:v>
+                </c:pt>
+                <c:pt idx="407">
+                  <c:v>192.72999572753901</c:v>
+                </c:pt>
+                <c:pt idx="408">
+                  <c:v>205.08000183105401</c:v>
+                </c:pt>
+                <c:pt idx="409">
+                  <c:v>205.36000061035099</c:v>
+                </c:pt>
+                <c:pt idx="410">
+                  <c:v>211.02999877929599</c:v>
+                </c:pt>
+                <c:pt idx="411">
+                  <c:v>228.33000183105401</c:v>
+                </c:pt>
+                <c:pt idx="412">
+                  <c:v>231.94999694824199</c:v>
+                </c:pt>
+                <c:pt idx="413">
+                  <c:v>232.30999755859301</c:v>
+                </c:pt>
+                <c:pt idx="414">
+                  <c:v>227.00999450683599</c:v>
+                </c:pt>
+                <c:pt idx="415">
+                  <c:v>239.52000427246</c:v>
+                </c:pt>
+                <c:pt idx="416">
+                  <c:v>241.97999572753901</c:v>
+                </c:pt>
+                <c:pt idx="417">
+                  <c:v>244.83999633789</c:v>
+                </c:pt>
+                <c:pt idx="418">
+                  <c:v>247.05999755859301</c:v>
+                </c:pt>
+                <c:pt idx="419">
+                  <c:v>255.33999633789</c:v>
+                </c:pt>
+                <c:pt idx="420">
+                  <c:v>255.02999877929599</c:v>
+                </c:pt>
+                <c:pt idx="421">
+                  <c:v>244.100006103515</c:v>
+                </c:pt>
+                <c:pt idx="422">
+                  <c:v>234.00999450683599</c:v>
+                </c:pt>
+                <c:pt idx="423">
+                  <c:v>238.69000244140599</c:v>
+                </c:pt>
+                <c:pt idx="424">
+                  <c:v>241.47000122070301</c:v>
+                </c:pt>
+                <c:pt idx="425">
+                  <c:v>235.13999938964801</c:v>
+                </c:pt>
+                <c:pt idx="426">
+                  <c:v>247.63000488281199</c:v>
+                </c:pt>
+                <c:pt idx="427">
+                  <c:v>258.66000366210898</c:v>
+                </c:pt>
+                <c:pt idx="428">
+                  <c:v>263.89999389648398</c:v>
+                </c:pt>
+                <c:pt idx="429">
+                  <c:v>262.75</c:v>
+                </c:pt>
+                <c:pt idx="430">
+                  <c:v>273.260009765625</c:v>
+                </c:pt>
+                <c:pt idx="431">
+                  <c:v>271.23001098632801</c:v>
+                </c:pt>
+                <c:pt idx="432">
+                  <c:v>273.35998535156199</c:v>
+                </c:pt>
+                <c:pt idx="433">
+                  <c:v>266.38000488281199</c:v>
+                </c:pt>
+                <c:pt idx="434">
+                  <c:v>267.70001220703102</c:v>
+                </c:pt>
+                <c:pt idx="435">
+                  <c:v>268.42001342773398</c:v>
+                </c:pt>
+                <c:pt idx="436">
+                  <c:v>276.05999755859301</c:v>
+                </c:pt>
+                <c:pt idx="437">
+                  <c:v>272.30999755859301</c:v>
+                </c:pt>
+                <c:pt idx="438">
+                  <c:v>273.20001220703102</c:v>
+                </c:pt>
+                <c:pt idx="439">
+                  <c:v>274.95999145507801</c:v>
+                </c:pt>
+                <c:pt idx="440">
+                  <c:v>267.77999877929602</c:v>
+                </c:pt>
+                <c:pt idx="441">
+                  <c:v>291.80999755859301</c:v>
+                </c:pt>
+                <c:pt idx="442">
+                  <c:v>285.88000488281199</c:v>
+                </c:pt>
+                <c:pt idx="443">
+                  <c:v>289.17999267578102</c:v>
+                </c:pt>
+                <c:pt idx="444">
+                  <c:v>279.85998535156199</c:v>
+                </c:pt>
+                <c:pt idx="445">
+                  <c:v>278.61999511718699</c:v>
+                </c:pt>
+                <c:pt idx="446">
+                  <c:v>274.829986572265</c:v>
+                </c:pt>
+                <c:pt idx="447">
+                  <c:v>267.76998901367102</c:v>
+                </c:pt>
+                <c:pt idx="448">
+                  <c:v>260.42001342773398</c:v>
+                </c:pt>
+                <c:pt idx="449">
+                  <c:v>264.52999877929602</c:v>
+                </c:pt>
+                <c:pt idx="450">
+                  <c:v>274.01998901367102</c:v>
+                </c:pt>
+                <c:pt idx="451">
+                  <c:v>273.600006103515</c:v>
+                </c:pt>
+                <c:pt idx="452">
+                  <c:v>267.47000122070301</c:v>
+                </c:pt>
+                <c:pt idx="453">
+                  <c:v>269.489990234375</c:v>
+                </c:pt>
+                <c:pt idx="454">
+                  <c:v>275.42999267578102</c:v>
+                </c:pt>
+                <c:pt idx="455">
+                  <c:v>289.95999145507801</c:v>
+                </c:pt>
+                <c:pt idx="456">
+                  <c:v>288.95999145507801</c:v>
+                </c:pt>
+                <c:pt idx="457">
+                  <c:v>283.35998535156199</c:v>
+                </c:pt>
+                <c:pt idx="458">
+                  <c:v>290.92001342773398</c:v>
+                </c:pt>
+                <c:pt idx="459">
+                  <c:v>284.14001464843699</c:v>
+                </c:pt>
+                <c:pt idx="460">
+                  <c:v>276.58999633789</c:v>
+                </c:pt>
+                <c:pt idx="461">
+                  <c:v>276.239990234375</c:v>
+                </c:pt>
+                <c:pt idx="462">
+                  <c:v>276.54000854492102</c:v>
+                </c:pt>
+                <c:pt idx="463">
+                  <c:v>285.35998535156199</c:v>
+                </c:pt>
+                <c:pt idx="464">
+                  <c:v>294.79000854492102</c:v>
+                </c:pt>
+                <c:pt idx="465">
+                  <c:v>319.88000488281199</c:v>
+                </c:pt>
+                <c:pt idx="466">
+                  <c:v>314.739990234375</c:v>
+                </c:pt>
+                <c:pt idx="467">
+                  <c:v>297.85998535156199</c:v>
+                </c:pt>
+                <c:pt idx="468">
+                  <c:v>298.76998901367102</c:v>
+                </c:pt>
+                <c:pt idx="469">
+                  <c:v>294.70999145507801</c:v>
+                </c:pt>
+                <c:pt idx="470">
+                  <c:v>291.23001098632801</c:v>
+                </c:pt>
+                <c:pt idx="471">
+                  <c:v>302.55999755859301</c:v>
+                </c:pt>
+                <c:pt idx="472">
+                  <c:v>305.64001464843699</c:v>
+                </c:pt>
+                <c:pt idx="473">
+                  <c:v>307.88000488281199</c:v>
+                </c:pt>
+                <c:pt idx="474">
+                  <c:v>303.76998901367102</c:v>
+                </c:pt>
+                <c:pt idx="475">
+                  <c:v>308.17001342773398</c:v>
+                </c:pt>
+                <c:pt idx="476">
+                  <c:v>311.80999755859301</c:v>
+                </c:pt>
+                <c:pt idx="477">
+                  <c:v>312.83999633789</c:v>
+                </c:pt>
+                <c:pt idx="478">
+                  <c:v>305.79998779296801</c:v>
+                </c:pt>
+                <c:pt idx="479">
+                  <c:v>307.510009765625</c:v>
+                </c:pt>
+                <c:pt idx="480">
+                  <c:v>317.22000122070301</c:v>
+                </c:pt>
+                <c:pt idx="481">
+                  <c:v>321.350006103515</c:v>
+                </c:pt>
+                <c:pt idx="482">
+                  <c:v>312.89001464843699</c:v>
+                </c:pt>
+                <c:pt idx="483">
+                  <c:v>312.20999145507801</c:v>
+                </c:pt>
+                <c:pt idx="484">
+                  <c:v>307.01998901367102</c:v>
+                </c:pt>
+                <c:pt idx="485">
+                  <c:v>308.76998901367102</c:v>
+                </c:pt>
+                <c:pt idx="486">
+                  <c:v>297.45999145507801</c:v>
+                </c:pt>
+                <c:pt idx="487">
+                  <c:v>296.38000488281199</c:v>
+                </c:pt>
+                <c:pt idx="488">
+                  <c:v>297.04000854492102</c:v>
+                </c:pt>
+                <c:pt idx="489">
+                  <c:v>291.510009765625</c:v>
+                </c:pt>
+                <c:pt idx="490">
+                  <c:v>287.58999633789</c:v>
+                </c:pt>
+                <c:pt idx="491">
+                  <c:v>298.92001342773398</c:v>
+                </c:pt>
+                <c:pt idx="492">
+                  <c:v>302.260009765625</c:v>
+                </c:pt>
+                <c:pt idx="493">
+                  <c:v>347.30999755859301</c:v>
+                </c:pt>
+                <c:pt idx="494">
+                  <c:v>346.04998779296801</c:v>
+                </c:pt>
+                <c:pt idx="495">
+                  <c:v>344.42999267578102</c:v>
+                </c:pt>
+                <c:pt idx="496">
+                  <c:v>334.39999389648398</c:v>
+                </c:pt>
+                <c:pt idx="497">
+                  <c:v>347.260009765625</c:v>
+                </c:pt>
+                <c:pt idx="498">
+                  <c:v>344.97000122070301</c:v>
+                </c:pt>
+                <c:pt idx="499">
+                  <c:v>338.52999877929602</c:v>
+                </c:pt>
+                <c:pt idx="500">
+                  <c:v>335.350006103515</c:v>
+                </c:pt>
+                <c:pt idx="501">
+                  <c:v>334.95999145507801</c:v>
+                </c:pt>
+                <c:pt idx="502">
+                  <c:v>317.69000244140602</c:v>
+                </c:pt>
+                <c:pt idx="503">
+                  <c:v>300.35998535156199</c:v>
+                </c:pt>
+                <c:pt idx="504">
+                  <c:v>310.11999511718699</c:v>
+                </c:pt>
+                <c:pt idx="505">
+                  <c:v>332.79998779296801</c:v>
+                </c:pt>
+                <c:pt idx="506">
+                  <c:v>333.86999511718699</c:v>
+                </c:pt>
+                <c:pt idx="507">
+                  <c:v>316.13000488281199</c:v>
+                </c:pt>
+                <c:pt idx="508">
+                  <c:v>326.08999633789</c:v>
+                </c:pt>
+                <c:pt idx="509">
+                  <c:v>295.39001464843699</c:v>
+                </c:pt>
+                <c:pt idx="510">
+                  <c:v>319.76998901367102</c:v>
+                </c:pt>
+                <c:pt idx="511">
+                  <c:v>315.38000488281199</c:v>
+                </c:pt>
+                <c:pt idx="512">
+                  <c:v>332.97000122070301</c:v>
+                </c:pt>
+                <c:pt idx="513">
+                  <c:v>337.02999877929602</c:v>
+                </c:pt>
+                <c:pt idx="514">
+                  <c:v>348.42001342773398</c:v>
+                </c:pt>
+                <c:pt idx="515">
+                  <c:v>365.70999145507801</c:v>
+                </c:pt>
+                <c:pt idx="516">
+                  <c:v>376.79000854492102</c:v>
+                </c:pt>
+                <c:pt idx="517">
+                  <c:v>366.600006103515</c:v>
+                </c:pt>
+                <c:pt idx="518">
+                  <c:v>366.760009765625</c:v>
+                </c:pt>
+                <c:pt idx="519">
+                  <c:v>365.14999389648398</c:v>
+                </c:pt>
+                <c:pt idx="520">
+                  <c:v>357.97000122070301</c:v>
+                </c:pt>
+                <c:pt idx="521">
+                  <c:v>363.05999755859301</c:v>
+                </c:pt>
+                <c:pt idx="522">
+                  <c:v>359.70001220703102</c:v>
+                </c:pt>
+                <c:pt idx="523">
+                  <c:v>358.489990234375</c:v>
+                </c:pt>
+                <c:pt idx="524">
+                  <c:v>350.48001098632801</c:v>
+                </c:pt>
+                <c:pt idx="525">
+                  <c:v>341.17001342773398</c:v>
+                </c:pt>
+                <c:pt idx="526">
+                  <c:v>347.86999511718699</c:v>
+                </c:pt>
+                <c:pt idx="527">
+                  <c:v>343.92001342773398</c:v>
+                </c:pt>
+                <c:pt idx="528">
+                  <c:v>346</c:v>
+                </c:pt>
+                <c:pt idx="529">
+                  <c:v>325.829986572265</c:v>
+                </c:pt>
+                <c:pt idx="530">
+                  <c:v>338.19000244140602</c:v>
+                </c:pt>
+                <c:pt idx="531">
+                  <c:v>347.489990234375</c:v>
+                </c:pt>
+                <c:pt idx="532">
+                  <c:v>353.47000122070301</c:v>
+                </c:pt>
+                <c:pt idx="533">
+                  <c:v>354.30999755859301</c:v>
+                </c:pt>
+                <c:pt idx="534">
+                  <c:v>348.44000244140602</c:v>
+                </c:pt>
+                <c:pt idx="535">
+                  <c:v>344</c:v>
+                </c:pt>
+                <c:pt idx="536">
+                  <c:v>338.73001098632801</c:v>
+                </c:pt>
+                <c:pt idx="537">
+                  <c:v>331.27999877929602</c:v>
+                </c:pt>
+                <c:pt idx="538">
+                  <c:v>350.510009765625</c:v>
+                </c:pt>
+                <c:pt idx="539">
+                  <c:v>351.39999389648398</c:v>
+                </c:pt>
+                <c:pt idx="540">
+                  <c:v>348.16000366210898</c:v>
+                </c:pt>
+                <c:pt idx="541">
+                  <c:v>341.05999755859301</c:v>
+                </c:pt>
+                <c:pt idx="542">
+                  <c:v>341.39999389648398</c:v>
+                </c:pt>
+                <c:pt idx="543">
+                  <c:v>346.41000366210898</c:v>
+                </c:pt>
+                <c:pt idx="544">
+                  <c:v>344.27999877929602</c:v>
+                </c:pt>
+                <c:pt idx="545">
+                  <c:v>337.32000732421801</c:v>
+                </c:pt>
+                <c:pt idx="546">
+                  <c:v>329.89999389648398</c:v>
+                </c:pt>
+                <c:pt idx="547">
+                  <c:v>334.850006103515</c:v>
+                </c:pt>
+                <c:pt idx="548">
+                  <c:v>330.89999389648398</c:v>
+                </c:pt>
+                <c:pt idx="549">
+                  <c:v>314.85998535156199</c:v>
+                </c:pt>
+                <c:pt idx="550">
+                  <c:v>288.5</c:v>
+                </c:pt>
+                <c:pt idx="551">
+                  <c:v>294.14001464843699</c:v>
+                </c:pt>
+                <c:pt idx="552">
+                  <c:v>260.95001220703102</c:v>
+                </c:pt>
+                <c:pt idx="553">
+                  <c:v>260</c:v>
+                </c:pt>
+                <c:pt idx="554">
+                  <c:v>263.91000366210898</c:v>
+                </c:pt>
+                <c:pt idx="555">
+                  <c:v>271.77999877929602</c:v>
+                </c:pt>
+                <c:pt idx="556">
+                  <c:v>276.58999633789</c:v>
+                </c:pt>
+                <c:pt idx="557">
+                  <c:v>259.58999633789</c:v>
+                </c:pt>
+                <c:pt idx="558">
+                  <c:v>258.77999877929602</c:v>
+                </c:pt>
+                <c:pt idx="559">
+                  <c:v>252.22999572753901</c:v>
+                </c:pt>
+                <c:pt idx="560">
+                  <c:v>256.88000488281199</c:v>
+                </c:pt>
+                <c:pt idx="561">
+                  <c:v>262.79998779296801</c:v>
+                </c:pt>
+                <c:pt idx="562">
+                  <c:v>250.55999755859301</c:v>
+                </c:pt>
+                <c:pt idx="563">
+                  <c:v>261.95001220703102</c:v>
+                </c:pt>
+                <c:pt idx="564">
+                  <c:v>281.829986572265</c:v>
+                </c:pt>
+                <c:pt idx="565">
+                  <c:v>294.79998779296801</c:v>
+                </c:pt>
+                <c:pt idx="566">
+                  <c:v>301.01998901367102</c:v>
+                </c:pt>
+                <c:pt idx="567">
+                  <c:v>310.70001220703102</c:v>
+                </c:pt>
+                <c:pt idx="568">
+                  <c:v>264.76998901367102</c:v>
+                </c:pt>
+                <c:pt idx="569">
+                  <c:v>307.51998901367102</c:v>
+                </c:pt>
+                <c:pt idx="570">
+                  <c:v>309.579986572265</c:v>
+                </c:pt>
+                <c:pt idx="571">
+                  <c:v>300.989990234375</c:v>
+                </c:pt>
+                <c:pt idx="572">
+                  <c:v>299.67999267578102</c:v>
+                </c:pt>
+                <c:pt idx="573">
+                  <c:v>299.100006103515</c:v>
+                </c:pt>
+                <c:pt idx="574">
+                  <c:v>298.329986572265</c:v>
+                </c:pt>
+                <c:pt idx="575">
+                  <c:v>299.01998901367102</c:v>
+                </c:pt>
+                <c:pt idx="576">
+                  <c:v>284.95999145507801</c:v>
+                </c:pt>
+                <c:pt idx="577">
+                  <c:v>294.83999633789</c:v>
+                </c:pt>
+                <c:pt idx="578">
+                  <c:v>295.20001220703102</c:v>
+                </c:pt>
+                <c:pt idx="579">
+                  <c:v>289.45999145507801</c:v>
+                </c:pt>
+                <c:pt idx="580">
+                  <c:v>290.54000854492102</c:v>
+                </c:pt>
+                <c:pt idx="581">
+                  <c:v>279.44000244140602</c:v>
+                </c:pt>
+                <c:pt idx="582">
+                  <c:v>285.5</c:v>
+                </c:pt>
+                <c:pt idx="583">
+                  <c:v>263.239990234375</c:v>
+                </c:pt>
+                <c:pt idx="584">
+                  <c:v>280.95001220703102</c:v>
+                </c:pt>
+                <c:pt idx="585">
+                  <c:v>280.739990234375</c:v>
+                </c:pt>
+                <c:pt idx="586">
+                  <c:v>288.95001220703102</c:v>
+                </c:pt>
+                <c:pt idx="587">
+                  <c:v>301.66000366210898</c:v>
+                </c:pt>
+                <c:pt idx="588">
+                  <c:v>303.14999389648398</c:v>
+                </c:pt>
+                <c:pt idx="589">
+                  <c:v>305.010009765625</c:v>
+                </c:pt>
+                <c:pt idx="590">
+                  <c:v>311.85998535156199</c:v>
+                </c:pt>
+                <c:pt idx="591">
+                  <c:v>319.26998901367102</c:v>
+                </c:pt>
+                <c:pt idx="592">
+                  <c:v>322.82000732421801</c:v>
+                </c:pt>
+                <c:pt idx="593">
+                  <c:v>320.100006103515</c:v>
+                </c:pt>
+                <c:pt idx="594">
+                  <c:v>321.64001464843699</c:v>
+                </c:pt>
+                <c:pt idx="595">
+                  <c:v>321.89999389648398</c:v>
+                </c:pt>
+                <c:pt idx="596">
+                  <c:v>308.44000244140602</c:v>
+                </c:pt>
+                <c:pt idx="597">
+                  <c:v>305.5</c:v>
+                </c:pt>
+                <c:pt idx="598">
+                  <c:v>335.45001220703102</c:v>
+                </c:pt>
+                <c:pt idx="599">
+                  <c:v>338.69000244140602</c:v>
+                </c:pt>
+                <c:pt idx="600">
+                  <c:v>347.64001464843699</c:v>
+                </c:pt>
+                <c:pt idx="601">
+                  <c:v>356.41000366210898</c:v>
+                </c:pt>
+                <c:pt idx="602">
+                  <c:v>355.489990234375</c:v>
+                </c:pt>
+                <c:pt idx="603">
+                  <c:v>352.45001220703102</c:v>
+                </c:pt>
+                <c:pt idx="604">
+                  <c:v>370.33999633789</c:v>
+                </c:pt>
+                <c:pt idx="605">
+                  <c:v>379.57000732421801</c:v>
+                </c:pt>
+                <c:pt idx="606">
+                  <c:v>341.989990234375</c:v>
+                </c:pt>
+                <c:pt idx="607">
+                  <c:v>348.17001342773398</c:v>
+                </c:pt>
+                <c:pt idx="608">
+                  <c:v>349.54000854492102</c:v>
+                </c:pt>
+                <c:pt idx="609">
+                  <c:v>300.83999633789</c:v>
+                </c:pt>
+                <c:pt idx="610">
+                  <c:v>298.14001464843699</c:v>
+                </c:pt>
+                <c:pt idx="611">
+                  <c:v>290.17001342773398</c:v>
+                </c:pt>
+                <c:pt idx="612">
+                  <c:v>297.17999267578102</c:v>
+                </c:pt>
+                <c:pt idx="613">
+                  <c:v>306.64999389648398</c:v>
+                </c:pt>
+                <c:pt idx="614">
+                  <c:v>308.739990234375</c:v>
+                </c:pt>
+                <c:pt idx="615">
+                  <c:v>297.42999267578102</c:v>
+                </c:pt>
+                <c:pt idx="616">
+                  <c:v>303.20001220703102</c:v>
+                </c:pt>
+                <c:pt idx="617">
+                  <c:v>313.579986572265</c:v>
+                </c:pt>
+                <c:pt idx="618">
+                  <c:v>320.23001098632801</c:v>
+                </c:pt>
+                <c:pt idx="619">
+                  <c:v>323.850006103515</c:v>
+                </c:pt>
+                <c:pt idx="620">
+                  <c:v>322.69000244140602</c:v>
+                </c:pt>
+                <c:pt idx="621">
+                  <c:v>310.100006103515</c:v>
+                </c:pt>
+                <c:pt idx="622">
+                  <c:v>318.86999511718699</c:v>
+                </c:pt>
+                <c:pt idx="623">
+                  <c:v>316.70999145507801</c:v>
+                </c:pt>
+                <c:pt idx="624">
+                  <c:v>318.95999145507801</c:v>
+                </c:pt>
+                <c:pt idx="625">
+                  <c:v>322.47000122070301</c:v>
+                </c:pt>
+                <c:pt idx="626">
+                  <c:v>318.510009765625</c:v>
+                </c:pt>
+                <c:pt idx="627">
+                  <c:v>308.89999389648398</c:v>
+                </c:pt>
+                <c:pt idx="628">
+                  <c:v>309.16000366210898</c:v>
+                </c:pt>
+                <c:pt idx="629">
+                  <c:v>310.85998535156199</c:v>
+                </c:pt>
+                <c:pt idx="630">
+                  <c:v>335.07000732421801</c:v>
+                </c:pt>
+                <c:pt idx="631">
+                  <c:v>342.95001220703102</c:v>
+                </c:pt>
+                <c:pt idx="632">
+                  <c:v>349.92999267578102</c:v>
+                </c:pt>
+                <c:pt idx="633">
+                  <c:v>344.5</c:v>
+                </c:pt>
+                <c:pt idx="634">
+                  <c:v>342</c:v>
+                </c:pt>
+                <c:pt idx="635">
+                  <c:v>333.010009765625</c:v>
+                </c:pt>
+                <c:pt idx="636">
+                  <c:v>333.63000488281199</c:v>
+                </c:pt>
+                <c:pt idx="637">
+                  <c:v>347.510009765625</c:v>
+                </c:pt>
+                <c:pt idx="638">
+                  <c:v>362.22000122070301</c:v>
+                </c:pt>
+                <c:pt idx="639">
+                  <c:v>352.54998779296801</c:v>
+                </c:pt>
+                <c:pt idx="640">
+                  <c:v>370.829986572265</c:v>
+                </c:pt>
+                <c:pt idx="641">
+                  <c:v>358.17001342773398</c:v>
+                </c:pt>
+                <c:pt idx="642">
+                  <c:v>357.72000122070301</c:v>
+                </c:pt>
+                <c:pt idx="643">
+                  <c:v>344.77999877929602</c:v>
+                </c:pt>
+                <c:pt idx="644">
+                  <c:v>342.76998901367102</c:v>
+                </c:pt>
+                <c:pt idx="645">
+                  <c:v>332.100006103515</c:v>
+                </c:pt>
+                <c:pt idx="646">
+                  <c:v>317.66000366210898</c:v>
+                </c:pt>
+                <c:pt idx="647">
+                  <c:v>316.08999633789</c:v>
+                </c:pt>
+                <c:pt idx="648">
+                  <c:v>319.5</c:v>
+                </c:pt>
+                <c:pt idx="649">
+                  <c:v>291.13000488281199</c:v>
+                </c:pt>
+                <c:pt idx="650">
+                  <c:v>296.739990234375</c:v>
+                </c:pt>
+                <c:pt idx="651">
+                  <c:v>291.82000732421801</c:v>
+                </c:pt>
+                <c:pt idx="652">
+                  <c:v>284.73001098632801</c:v>
+                </c:pt>
+                <c:pt idx="653">
+                  <c:v>291.72000122070301</c:v>
+                </c:pt>
+                <c:pt idx="654">
+                  <c:v>283.760009765625</c:v>
+                </c:pt>
+                <c:pt idx="655">
+                  <c:v>278.850006103515</c:v>
+                </c:pt>
+                <c:pt idx="656">
+                  <c:v>277.850006103515</c:v>
+                </c:pt>
+                <c:pt idx="657">
+                  <c:v>279.07000732421801</c:v>
+                </c:pt>
+                <c:pt idx="658">
+                  <c:v>275.010009765625</c:v>
+                </c:pt>
+                <c:pt idx="659">
+                  <c:v>284.489990234375</c:v>
+                </c:pt>
+                <c:pt idx="660">
+                  <c:v>276.82000732421801</c:v>
+                </c:pt>
+                <c:pt idx="661">
+                  <c:v>284.54000854492102</c:v>
+                </c:pt>
+                <c:pt idx="662">
+                  <c:v>286.48001098632801</c:v>
+                </c:pt>
+                <c:pt idx="663">
+                  <c:v>284.17999267578102</c:v>
+                </c:pt>
+                <c:pt idx="664">
+                  <c:v>291.97000122070301</c:v>
+                </c:pt>
+                <c:pt idx="665">
+                  <c:v>301.05999755859301</c:v>
+                </c:pt>
+                <c:pt idx="666">
+                  <c:v>305.01998901367102</c:v>
+                </c:pt>
+                <c:pt idx="667">
+                  <c:v>306.850006103515</c:v>
+                </c:pt>
+                <c:pt idx="668">
+                  <c:v>301.97000122070301</c:v>
+                </c:pt>
+                <c:pt idx="669">
+                  <c:v>302.76998901367102</c:v>
+                </c:pt>
+                <c:pt idx="670">
+                  <c:v>294.08999633789</c:v>
+                </c:pt>
+                <c:pt idx="671">
+                  <c:v>284.45001220703102</c:v>
+                </c:pt>
+                <c:pt idx="672">
+                  <c:v>301.14999389648398</c:v>
+                </c:pt>
+                <c:pt idx="673">
+                  <c:v>299.92001342773398</c:v>
+                </c:pt>
+                <c:pt idx="674">
+                  <c:v>293.89999389648398</c:v>
+                </c:pt>
+                <c:pt idx="675">
+                  <c:v>294.079986572265</c:v>
+                </c:pt>
+                <c:pt idx="676">
+                  <c:v>285.48001098632801</c:v>
+                </c:pt>
+                <c:pt idx="677">
+                  <c:v>280.69000244140602</c:v>
+                </c:pt>
+                <c:pt idx="678">
+                  <c:v>283.45999145507801</c:v>
+                </c:pt>
+                <c:pt idx="679">
+                  <c:v>283.36999511718699</c:v>
+                </c:pt>
+                <c:pt idx="680">
+                  <c:v>290.239990234375</c:v>
+                </c:pt>
+                <c:pt idx="681">
+                  <c:v>300.079986572265</c:v>
+                </c:pt>
+                <c:pt idx="682">
+                  <c:v>293.350006103515</c:v>
+                </c:pt>
+                <c:pt idx="683">
+                  <c:v>287.69000244140602</c:v>
+                </c:pt>
+                <c:pt idx="684">
+                  <c:v>291.20999145507801</c:v>
+                </c:pt>
+                <c:pt idx="685">
+                  <c:v>300.33999633789</c:v>
+                </c:pt>
+                <c:pt idx="686">
+                  <c:v>294.079986572265</c:v>
+                </c:pt>
+                <c:pt idx="687">
+                  <c:v>300.92999267578102</c:v>
+                </c:pt>
+                <c:pt idx="688">
+                  <c:v>304.70001220703102</c:v>
+                </c:pt>
+                <c:pt idx="689">
+                  <c:v>289.66000366210898</c:v>
+                </c:pt>
+                <c:pt idx="690">
+                  <c:v>299.29998779296801</c:v>
+                </c:pt>
+                <c:pt idx="691">
+                  <c:v>305.72000122070301</c:v>
+                </c:pt>
+                <c:pt idx="692">
+                  <c:v>286.94000244140602</c:v>
+                </c:pt>
+                <c:pt idx="693">
+                  <c:v>267.52999877929602</c:v>
+                </c:pt>
+                <c:pt idx="694">
+                  <c:v>252.47999572753901</c:v>
+                </c:pt>
+                <c:pt idx="695">
+                  <c:v>266.13000488281199</c:v>
+                </c:pt>
+                <c:pt idx="696">
+                  <c:v>257.77999877929602</c:v>
+                </c:pt>
+                <c:pt idx="697">
+                  <c:v>279.17999267578102</c:v>
+                </c:pt>
+                <c:pt idx="698">
+                  <c:v>304.17999267578102</c:v>
+                </c:pt>
+                <c:pt idx="699">
+                  <c:v>301.54000854492102</c:v>
+                </c:pt>
+                <c:pt idx="700">
+                  <c:v>309.100006103515</c:v>
+                </c:pt>
+                <c:pt idx="701">
+                  <c:v>316.52999877929602</c:v>
+                </c:pt>
+                <c:pt idx="702">
+                  <c:v>310.54998779296801</c:v>
+                </c:pt>
+                <c:pt idx="703">
+                  <c:v>313.55999755859301</c:v>
+                </c:pt>
+                <c:pt idx="704">
+                  <c:v>321.350006103515</c:v>
+                </c:pt>
+                <c:pt idx="705">
+                  <c:v>325.600006103515</c:v>
+                </c:pt>
+                <c:pt idx="706">
+                  <c:v>326.63000488281199</c:v>
+                </c:pt>
+                <c:pt idx="707">
+                  <c:v>341.83999633789</c:v>
+                </c:pt>
+                <c:pt idx="708">
+                  <c:v>345.510009765625</c:v>
+                </c:pt>
+                <c:pt idx="709">
+                  <c:v>327.17001342773398</c:v>
+                </c:pt>
+                <c:pt idx="710">
+                  <c:v>329.100006103515</c:v>
+                </c:pt>
+                <c:pt idx="711">
+                  <c:v>332.29998779296801</c:v>
+                </c:pt>
+                <c:pt idx="712">
+                  <c:v>328.20001220703102</c:v>
+                </c:pt>
+                <c:pt idx="713">
+                  <c:v>333.350006103515</c:v>
+                </c:pt>
+                <c:pt idx="714">
+                  <c:v>335.11999511718699</c:v>
+                </c:pt>
+                <c:pt idx="715">
+                  <c:v>330.92999267578102</c:v>
+                </c:pt>
+                <c:pt idx="716">
+                  <c:v>343.05999755859301</c:v>
+                </c:pt>
+                <c:pt idx="717">
+                  <c:v>350.989990234375</c:v>
+                </c:pt>
+                <c:pt idx="718">
+                  <c:v>357.42001342773398</c:v>
+                </c:pt>
+                <c:pt idx="719">
+                  <c:v>352.04998779296801</c:v>
+                </c:pt>
+                <c:pt idx="720">
+                  <c:v>346.17001342773398</c:v>
+                </c:pt>
+                <c:pt idx="721">
+                  <c:v>333.29998779296801</c:v>
+                </c:pt>
+                <c:pt idx="722">
+                  <c:v>334.76998901367102</c:v>
+                </c:pt>
+                <c:pt idx="723">
+                  <c:v>335.489990234375</c:v>
+                </c:pt>
+                <c:pt idx="724">
+                  <c:v>334.07000732421801</c:v>
+                </c:pt>
+                <c:pt idx="725">
+                  <c:v>322.30999755859301</c:v>
+                </c:pt>
+                <c:pt idx="726">
+                  <c:v>323.66000366210898</c:v>
+                </c:pt>
+                <c:pt idx="727">
+                  <c:v>315.73001098632801</c:v>
+                </c:pt>
+                <c:pt idx="728">
+                  <c:v>310.42001342773398</c:v>
+                </c:pt>
+                <c:pt idx="729">
+                  <c:v>315.23001098632801</c:v>
+                </c:pt>
+                <c:pt idx="730">
+                  <c:v>345</c:v>
+                </c:pt>
+                <c:pt idx="731">
+                  <c:v>333.97000122070301</c:v>
+                </c:pt>
+                <c:pt idx="732">
+                  <c:v>333.13000488281199</c:v>
+                </c:pt>
+                <c:pt idx="733">
+                  <c:v>343.75</c:v>
+                </c:pt>
+                <c:pt idx="734">
+                  <c:v>349.25</c:v>
+                </c:pt>
+                <c:pt idx="735">
+                  <c:v>354.30999755859301</c:v>
+                </c:pt>
+                <c:pt idx="736">
+                  <c:v>345.82000732421801</c:v>
+                </c:pt>
+                <c:pt idx="737">
+                  <c:v>349.52999877929602</c:v>
+                </c:pt>
+                <c:pt idx="738">
+                  <c:v>342.850006103515</c:v>
+                </c:pt>
+                <c:pt idx="739">
+                  <c:v>337.64001464843699</c:v>
+                </c:pt>
+                <c:pt idx="740">
+                  <c:v>345.89001464843699</c:v>
+                </c:pt>
+                <c:pt idx="741">
+                  <c:v>352.79000854492102</c:v>
+                </c:pt>
+                <c:pt idx="742">
+                  <c:v>351.55999755859301</c:v>
+                </c:pt>
+                <c:pt idx="743">
+                  <c:v>350.01998901367102</c:v>
+                </c:pt>
+                <c:pt idx="744">
+                  <c:v>344.57000732421801</c:v>
+                </c:pt>
+                <c:pt idx="745">
+                  <c:v>347.16000366210898</c:v>
+                </c:pt>
+                <c:pt idx="746">
+                  <c:v>340.05999755859301</c:v>
+                </c:pt>
+                <c:pt idx="747">
+                  <c:v>336.22000122070301</c:v>
+                </c:pt>
+                <c:pt idx="748">
+                  <c:v>337.95001220703102</c:v>
+                </c:pt>
+                <c:pt idx="749">
+                  <c:v>334.79998779296801</c:v>
+                </c:pt>
+                <c:pt idx="750">
+                  <c:v>333.69000244140602</c:v>
+                </c:pt>
+                <c:pt idx="751">
+                  <c:v>336.41000366210898</c:v>
+                </c:pt>
+                <c:pt idx="752">
+                  <c:v>316.579986572265</c:v>
+                </c:pt>
+                <c:pt idx="753">
+                  <c:v>314.61999511718699</c:v>
+                </c:pt>
+                <c:pt idx="754">
+                  <c:v>317.25</c:v>
+                </c:pt>
+                <c:pt idx="755">
+                  <c:v>320.52999877929602</c:v>
+                </c:pt>
+              </c:numCache>
+            </c:numRef>
+          </c:val>
+          <c:smooth val="0"/>
+          <c:extLst>
+            <c:ext xmlns:c16="http://schemas.microsoft.com/office/drawing/2014/chart" uri="{C3380CC4-5D6E-409C-BE32-E72D297353CC}">
+              <c16:uniqueId val="{00000000-299D-4873-87D0-C54B27D69A0F}"/>
+            </c:ext>
+          </c:extLst>
+        </c:ser>
+        <c:dLbls>
+          <c:showLegendKey val="0"/>
+          <c:showVal val="0"/>
+          <c:showCatName val="0"/>
+          <c:showSerName val="0"/>
+          <c:showPercent val="0"/>
+          <c:showBubbleSize val="0"/>
+        </c:dLbls>
+        <c:smooth val="0"/>
+        <c:axId val="1142686752"/>
+        <c:axId val="1142682592"/>
+      </c:lineChart>
+      <c:dateAx>
+        <c:axId val="1142686752"/>
+        <c:scaling>
+          <c:orientation val="minMax"/>
+        </c:scaling>
+        <c:delete val="0"/>
+        <c:axPos val="b"/>
+        <c:numFmt formatCode="m/d/yyyy" sourceLinked="1"/>
+        <c:majorTickMark val="out"/>
+        <c:minorTickMark val="none"/>
+        <c:tickLblPos val="nextTo"/>
+        <c:spPr>
+          <a:noFill/>
+          <a:ln w="9525" cap="flat" cmpd="sng" algn="ctr">
+            <a:solidFill>
+              <a:schemeClr val="tx1">
+                <a:lumMod val="15000"/>
+                <a:lumOff val="85000"/>
+              </a:schemeClr>
+            </a:solidFill>
+            <a:round/>
+          </a:ln>
+          <a:effectLst/>
+        </c:spPr>
+        <c:txPr>
+          <a:bodyPr rot="-60000000" spcFirstLastPara="1" vertOverflow="ellipsis" vert="horz" wrap="square" anchor="ctr" anchorCtr="1"/>
+          <a:lstStyle/>
+          <a:p>
+            <a:pPr>
+              <a:defRPr sz="900" b="0" i="0" u="none" strike="noStrike" kern="1200" baseline="0">
+                <a:solidFill>
+                  <a:schemeClr val="tx1">
+                    <a:lumMod val="65000"/>
+                    <a:lumOff val="35000"/>
+                  </a:schemeClr>
+                </a:solidFill>
+                <a:latin typeface="+mn-lt"/>
+                <a:ea typeface="+mn-ea"/>
+                <a:cs typeface="+mn-cs"/>
+              </a:defRPr>
+            </a:pPr>
+            <a:endParaRPr lang="fr-FR"/>
+          </a:p>
+        </c:txPr>
+        <c:crossAx val="1142682592"/>
+        <c:crosses val="autoZero"/>
+        <c:auto val="1"/>
+        <c:lblOffset val="100"/>
+        <c:baseTimeUnit val="days"/>
+      </c:dateAx>
+      <c:valAx>
+        <c:axId val="1142682592"/>
+        <c:scaling>
+          <c:orientation val="minMax"/>
+        </c:scaling>
+        <c:delete val="0"/>
+        <c:axPos val="l"/>
+        <c:majorGridlines>
+          <c:spPr>
+            <a:ln w="9525" cap="flat" cmpd="sng" algn="ctr">
+              <a:solidFill>
+                <a:schemeClr val="tx1">
+                  <a:lumMod val="15000"/>
+                  <a:lumOff val="85000"/>
+                </a:schemeClr>
+              </a:solidFill>
+              <a:round/>
+            </a:ln>
+            <a:effectLst/>
+          </c:spPr>
+        </c:majorGridlines>
+        <c:numFmt formatCode="General" sourceLinked="1"/>
+        <c:majorTickMark val="none"/>
+        <c:minorTickMark val="none"/>
+        <c:tickLblPos val="nextTo"/>
+        <c:spPr>
+          <a:noFill/>
+          <a:ln>
+            <a:noFill/>
+          </a:ln>
+          <a:effectLst/>
+        </c:spPr>
+        <c:txPr>
+          <a:bodyPr rot="-60000000" spcFirstLastPara="1" vertOverflow="ellipsis" vert="horz" wrap="square" anchor="ctr" anchorCtr="1"/>
+          <a:lstStyle/>
+          <a:p>
+            <a:pPr>
+              <a:defRPr sz="900" b="0" i="0" u="none" strike="noStrike" kern="1200" baseline="0">
+                <a:solidFill>
+                  <a:schemeClr val="tx1">
+                    <a:lumMod val="65000"/>
+                    <a:lumOff val="35000"/>
+                  </a:schemeClr>
+                </a:solidFill>
+                <a:latin typeface="+mn-lt"/>
+                <a:ea typeface="+mn-ea"/>
+                <a:cs typeface="+mn-cs"/>
+              </a:defRPr>
+            </a:pPr>
+            <a:endParaRPr lang="fr-FR"/>
+          </a:p>
+        </c:txPr>
+        <c:crossAx val="1142686752"/>
+        <c:crosses val="autoZero"/>
+        <c:crossBetween val="between"/>
+      </c:valAx>
+      <c:spPr>
+        <a:noFill/>
+        <a:ln>
+          <a:noFill/>
+        </a:ln>
+        <a:effectLst/>
+      </c:spPr>
+    </c:plotArea>
+    <c:plotVisOnly val="1"/>
+    <c:dispBlanksAs val="gap"/>
+    <c:extLst>
+      <c:ext xmlns:c16r3="http://schemas.microsoft.com/office/drawing/2017/03/chart" uri="{56B9EC1D-385E-4148-901F-78D8002777C0}">
+        <c16r3:dataDisplayOptions16>
+          <c16r3:dispNaAsBlank val="1"/>
+        </c16r3:dataDisplayOptions16>
+      </c:ext>
+    </c:extLst>
+    <c:showDLblsOverMax val="0"/>
+  </c:chart>
+  <c:spPr>
+    <a:noFill/>
+    <a:ln>
+      <a:noFill/>
+    </a:ln>
+    <a:effectLst/>
+  </c:spPr>
+  <c:txPr>
+    <a:bodyPr/>
+    <a:lstStyle/>
+    <a:p>
+      <a:pPr>
+        <a:defRPr/>
+      </a:pPr>
+      <a:endParaRPr lang="fr-FR"/>
+    </a:p>
+  </c:txPr>
+  <c:externalData r:id="rId3">
+    <c:autoUpdate val="0"/>
+  </c:externalData>
+</c:chartSpace>
+</file>
+
+<file path=ppt/charts/chart2.xml><?xml version="1.0" encoding="utf-8"?>
+<c:chartSpace xmlns:c="http://schemas.openxmlformats.org/drawingml/2006/chart" xmlns:a="http://schemas.openxmlformats.org/drawingml/2006/main" xmlns:r="http://schemas.openxmlformats.org/officeDocument/2006/relationships" xmlns:c16r2="http://schemas.microsoft.com/office/drawing/2015/06/chart">
+  <c:date1904 val="0"/>
+  <c:lang val="fr-FR"/>
   <c:roundedCorners val="1"/>
   <c:style val="2"/>
   <c:chart>
@@ -146,13 +4979,13 @@
               </a:defRPr>
             </a:pPr>
             <a:r>
-              <a:rPr lang="fr-FR" sz="1400" b="0" i="0" u="none" strike="noStrike">
+              <a:rPr lang="fr-FR" sz="1400" b="0" i="0" u="none" strike="noStrike" dirty="0">
                 <a:solidFill>
                   <a:srgbClr val="1A1A2E"/>
                 </a:solidFill>
                 <a:latin typeface="Calibri"/>
               </a:rPr>
-              <a:t>R² sur le jeu de test (plus proche de 0 = mieux)</a:t>
+              <a:t>R² sur le jeu de test (plus proche de 1 = mieux)</a:t>
             </a:r>
           </a:p>
         </c:rich>
@@ -400,6 +5233,562 @@
     <c:autoUpdate val="0"/>
   </c:externalData>
 </c:chartSpace>
+</file>
+
+<file path=ppt/charts/colors1.xml><?xml version="1.0" encoding="utf-8"?>
+<cs:colorStyle xmlns:cs="http://schemas.microsoft.com/office/drawing/2012/chartStyle" xmlns:a="http://schemas.openxmlformats.org/drawingml/2006/main" meth="cycle" id="10">
+  <a:schemeClr val="accent1"/>
+  <a:schemeClr val="accent2"/>
+  <a:schemeClr val="accent3"/>
+  <a:schemeClr val="accent4"/>
+  <a:schemeClr val="accent5"/>
+  <a:schemeClr val="accent6"/>
+  <cs:variation/>
+  <cs:variation>
+    <a:lumMod val="60000"/>
+  </cs:variation>
+  <cs:variation>
+    <a:lumMod val="80000"/>
+    <a:lumOff val="20000"/>
+  </cs:variation>
+  <cs:variation>
+    <a:lumMod val="80000"/>
+  </cs:variation>
+  <cs:variation>
+    <a:lumMod val="60000"/>
+    <a:lumOff val="40000"/>
+  </cs:variation>
+  <cs:variation>
+    <a:lumMod val="50000"/>
+  </cs:variation>
+  <cs:variation>
+    <a:lumMod val="70000"/>
+    <a:lumOff val="30000"/>
+  </cs:variation>
+  <cs:variation>
+    <a:lumMod val="70000"/>
+  </cs:variation>
+  <cs:variation>
+    <a:lumMod val="50000"/>
+    <a:lumOff val="50000"/>
+  </cs:variation>
+</cs:colorStyle>
+</file>
+
+<file path=ppt/charts/style1.xml><?xml version="1.0" encoding="utf-8"?>
+<cs:chartStyle xmlns:cs="http://schemas.microsoft.com/office/drawing/2012/chartStyle" xmlns:a="http://schemas.openxmlformats.org/drawingml/2006/main" id="227">
+  <cs:axisTitle>
+    <cs:lnRef idx="0"/>
+    <cs:fillRef idx="0"/>
+    <cs:effectRef idx="0"/>
+    <cs:fontRef idx="minor">
+      <a:schemeClr val="tx1">
+        <a:lumMod val="65000"/>
+        <a:lumOff val="35000"/>
+      </a:schemeClr>
+    </cs:fontRef>
+    <cs:defRPr sz="1000" kern="1200"/>
+  </cs:axisTitle>
+  <cs:categoryAxis>
+    <cs:lnRef idx="0"/>
+    <cs:fillRef idx="0"/>
+    <cs:effectRef idx="0"/>
+    <cs:fontRef idx="minor">
+      <a:schemeClr val="tx1">
+        <a:lumMod val="65000"/>
+        <a:lumOff val="35000"/>
+      </a:schemeClr>
+    </cs:fontRef>
+    <cs:spPr>
+      <a:ln w="9525" cap="flat" cmpd="sng" algn="ctr">
+        <a:solidFill>
+          <a:schemeClr val="tx1">
+            <a:lumMod val="15000"/>
+            <a:lumOff val="85000"/>
+          </a:schemeClr>
+        </a:solidFill>
+        <a:round/>
+      </a:ln>
+    </cs:spPr>
+    <cs:defRPr sz="900" kern="1200"/>
+  </cs:categoryAxis>
+  <cs:chartArea mods="allowNoFillOverride allowNoLineOverride">
+    <cs:lnRef idx="0"/>
+    <cs:fillRef idx="0"/>
+    <cs:effectRef idx="0"/>
+    <cs:fontRef idx="minor">
+      <a:schemeClr val="tx1"/>
+    </cs:fontRef>
+    <cs:spPr>
+      <a:solidFill>
+        <a:schemeClr val="bg1"/>
+      </a:solidFill>
+      <a:ln w="9525" cap="flat" cmpd="sng" algn="ctr">
+        <a:solidFill>
+          <a:schemeClr val="tx1">
+            <a:lumMod val="15000"/>
+            <a:lumOff val="85000"/>
+          </a:schemeClr>
+        </a:solidFill>
+        <a:round/>
+      </a:ln>
+    </cs:spPr>
+    <cs:defRPr sz="1000" kern="1200"/>
+  </cs:chartArea>
+  <cs:dataLabel>
+    <cs:lnRef idx="0"/>
+    <cs:fillRef idx="0"/>
+    <cs:effectRef idx="0"/>
+    <cs:fontRef idx="minor">
+      <a:schemeClr val="tx1">
+        <a:lumMod val="75000"/>
+        <a:lumOff val="25000"/>
+      </a:schemeClr>
+    </cs:fontRef>
+    <cs:defRPr sz="900" kern="1200"/>
+  </cs:dataLabel>
+  <cs:dataLabelCallout>
+    <cs:lnRef idx="0"/>
+    <cs:fillRef idx="0"/>
+    <cs:effectRef idx="0"/>
+    <cs:fontRef idx="minor">
+      <a:schemeClr val="dk1">
+        <a:lumMod val="65000"/>
+        <a:lumOff val="35000"/>
+      </a:schemeClr>
+    </cs:fontRef>
+    <cs:spPr>
+      <a:solidFill>
+        <a:schemeClr val="lt1"/>
+      </a:solidFill>
+      <a:ln>
+        <a:solidFill>
+          <a:schemeClr val="dk1">
+            <a:lumMod val="25000"/>
+            <a:lumOff val="75000"/>
+          </a:schemeClr>
+        </a:solidFill>
+      </a:ln>
+    </cs:spPr>
+    <cs:defRPr sz="900" kern="1200"/>
+    <cs:bodyPr rot="0" spcFirstLastPara="1" vertOverflow="clip" horzOverflow="clip" vert="horz" wrap="square" lIns="36576" tIns="18288" rIns="36576" bIns="18288" anchor="ctr" anchorCtr="1">
+      <a:spAutoFit/>
+    </cs:bodyPr>
+  </cs:dataLabelCallout>
+  <cs:dataPoint>
+    <cs:lnRef idx="0"/>
+    <cs:fillRef idx="1">
+      <cs:styleClr val="auto"/>
+    </cs:fillRef>
+    <cs:effectRef idx="0"/>
+    <cs:fontRef idx="minor">
+      <a:schemeClr val="tx1"/>
+    </cs:fontRef>
+    <cs:spPr>
+      <a:solidFill>
+        <a:schemeClr val="phClr"/>
+      </a:solidFill>
+    </cs:spPr>
+  </cs:dataPoint>
+  <cs:dataPoint3D>
+    <cs:lnRef idx="0"/>
+    <cs:fillRef idx="1">
+      <cs:styleClr val="auto"/>
+    </cs:fillRef>
+    <cs:effectRef idx="0"/>
+    <cs:fontRef idx="minor">
+      <a:schemeClr val="tx1"/>
+    </cs:fontRef>
+    <cs:spPr>
+      <a:solidFill>
+        <a:schemeClr val="phClr"/>
+      </a:solidFill>
+    </cs:spPr>
+  </cs:dataPoint3D>
+  <cs:dataPointLine>
+    <cs:lnRef idx="0">
+      <cs:styleClr val="auto"/>
+    </cs:lnRef>
+    <cs:fillRef idx="1"/>
+    <cs:effectRef idx="0"/>
+    <cs:fontRef idx="minor">
+      <a:schemeClr val="tx1"/>
+    </cs:fontRef>
+    <cs:spPr>
+      <a:ln w="28575" cap="rnd">
+        <a:solidFill>
+          <a:schemeClr val="phClr"/>
+        </a:solidFill>
+        <a:round/>
+      </a:ln>
+    </cs:spPr>
+  </cs:dataPointLine>
+  <cs:dataPointMarker>
+    <cs:lnRef idx="0">
+      <cs:styleClr val="auto"/>
+    </cs:lnRef>
+    <cs:fillRef idx="1">
+      <cs:styleClr val="auto"/>
+    </cs:fillRef>
+    <cs:effectRef idx="0"/>
+    <cs:fontRef idx="minor">
+      <a:schemeClr val="tx1"/>
+    </cs:fontRef>
+    <cs:spPr>
+      <a:solidFill>
+        <a:schemeClr val="phClr"/>
+      </a:solidFill>
+      <a:ln w="9525">
+        <a:solidFill>
+          <a:schemeClr val="phClr"/>
+        </a:solidFill>
+      </a:ln>
+    </cs:spPr>
+  </cs:dataPointMarker>
+  <cs:dataPointMarkerLayout symbol="circle" size="5"/>
+  <cs:dataPointWireframe>
+    <cs:lnRef idx="0">
+      <cs:styleClr val="auto"/>
+    </cs:lnRef>
+    <cs:fillRef idx="1"/>
+    <cs:effectRef idx="0"/>
+    <cs:fontRef idx="minor">
+      <a:schemeClr val="tx1"/>
+    </cs:fontRef>
+    <cs:spPr>
+      <a:ln w="9525" cap="rnd">
+        <a:solidFill>
+          <a:schemeClr val="phClr"/>
+        </a:solidFill>
+        <a:round/>
+      </a:ln>
+    </cs:spPr>
+  </cs:dataPointWireframe>
+  <cs:dataTable>
+    <cs:lnRef idx="0"/>
+    <cs:fillRef idx="0"/>
+    <cs:effectRef idx="0"/>
+    <cs:fontRef idx="minor">
+      <a:schemeClr val="tx1">
+        <a:lumMod val="65000"/>
+        <a:lumOff val="35000"/>
+      </a:schemeClr>
+    </cs:fontRef>
+    <cs:spPr>
+      <a:noFill/>
+      <a:ln w="9525" cap="flat" cmpd="sng" algn="ctr">
+        <a:solidFill>
+          <a:schemeClr val="tx1">
+            <a:lumMod val="15000"/>
+            <a:lumOff val="85000"/>
+          </a:schemeClr>
+        </a:solidFill>
+        <a:round/>
+      </a:ln>
+    </cs:spPr>
+    <cs:defRPr sz="900" kern="1200"/>
+  </cs:dataTable>
+  <cs:downBar>
+    <cs:lnRef idx="0"/>
+    <cs:fillRef idx="0"/>
+    <cs:effectRef idx="0"/>
+    <cs:fontRef idx="minor">
+      <a:schemeClr val="dk1"/>
+    </cs:fontRef>
+    <cs:spPr>
+      <a:solidFill>
+        <a:schemeClr val="dk1">
+          <a:lumMod val="65000"/>
+          <a:lumOff val="35000"/>
+        </a:schemeClr>
+      </a:solidFill>
+      <a:ln w="9525">
+        <a:solidFill>
+          <a:schemeClr val="tx1">
+            <a:lumMod val="65000"/>
+            <a:lumOff val="35000"/>
+          </a:schemeClr>
+        </a:solidFill>
+      </a:ln>
+    </cs:spPr>
+  </cs:downBar>
+  <cs:dropLine>
+    <cs:lnRef idx="0"/>
+    <cs:fillRef idx="0"/>
+    <cs:effectRef idx="0"/>
+    <cs:fontRef idx="minor">
+      <a:schemeClr val="tx1"/>
+    </cs:fontRef>
+    <cs:spPr>
+      <a:ln w="9525" cap="flat" cmpd="sng" algn="ctr">
+        <a:solidFill>
+          <a:schemeClr val="tx1">
+            <a:lumMod val="35000"/>
+            <a:lumOff val="65000"/>
+          </a:schemeClr>
+        </a:solidFill>
+        <a:round/>
+      </a:ln>
+    </cs:spPr>
+  </cs:dropLine>
+  <cs:errorBar>
+    <cs:lnRef idx="0"/>
+    <cs:fillRef idx="0"/>
+    <cs:effectRef idx="0"/>
+    <cs:fontRef idx="minor">
+      <a:schemeClr val="tx1"/>
+    </cs:fontRef>
+    <cs:spPr>
+      <a:ln w="9525" cap="flat" cmpd="sng" algn="ctr">
+        <a:solidFill>
+          <a:schemeClr val="tx1">
+            <a:lumMod val="65000"/>
+            <a:lumOff val="35000"/>
+          </a:schemeClr>
+        </a:solidFill>
+        <a:round/>
+      </a:ln>
+    </cs:spPr>
+  </cs:errorBar>
+  <cs:floor>
+    <cs:lnRef idx="0"/>
+    <cs:fillRef idx="0"/>
+    <cs:effectRef idx="0"/>
+    <cs:fontRef idx="minor">
+      <a:schemeClr val="tx1"/>
+    </cs:fontRef>
+    <cs:spPr>
+      <a:noFill/>
+      <a:ln>
+        <a:noFill/>
+      </a:ln>
+    </cs:spPr>
+  </cs:floor>
+  <cs:gridlineMajor>
+    <cs:lnRef idx="0"/>
+    <cs:fillRef idx="0"/>
+    <cs:effectRef idx="0"/>
+    <cs:fontRef idx="minor">
+      <a:schemeClr val="tx1"/>
+    </cs:fontRef>
+    <cs:spPr>
+      <a:ln w="9525" cap="flat" cmpd="sng" algn="ctr">
+        <a:solidFill>
+          <a:schemeClr val="tx1">
+            <a:lumMod val="15000"/>
+            <a:lumOff val="85000"/>
+          </a:schemeClr>
+        </a:solidFill>
+        <a:round/>
+      </a:ln>
+    </cs:spPr>
+  </cs:gridlineMajor>
+  <cs:gridlineMinor>
+    <cs:lnRef idx="0"/>
+    <cs:fillRef idx="0"/>
+    <cs:effectRef idx="0"/>
+    <cs:fontRef idx="minor">
+      <a:schemeClr val="tx1"/>
+    </cs:fontRef>
+    <cs:spPr>
+      <a:ln w="9525" cap="flat" cmpd="sng" algn="ctr">
+        <a:solidFill>
+          <a:schemeClr val="tx1">
+            <a:lumMod val="5000"/>
+            <a:lumOff val="95000"/>
+          </a:schemeClr>
+        </a:solidFill>
+        <a:round/>
+      </a:ln>
+    </cs:spPr>
+  </cs:gridlineMinor>
+  <cs:hiLoLine>
+    <cs:lnRef idx="0"/>
+    <cs:fillRef idx="0"/>
+    <cs:effectRef idx="0"/>
+    <cs:fontRef idx="minor">
+      <a:schemeClr val="tx1"/>
+    </cs:fontRef>
+    <cs:spPr>
+      <a:ln w="9525" cap="flat" cmpd="sng" algn="ctr">
+        <a:solidFill>
+          <a:schemeClr val="tx1">
+            <a:lumMod val="75000"/>
+            <a:lumOff val="25000"/>
+          </a:schemeClr>
+        </a:solidFill>
+        <a:round/>
+      </a:ln>
+    </cs:spPr>
+  </cs:hiLoLine>
+  <cs:leaderLine>
+    <cs:lnRef idx="0"/>
+    <cs:fillRef idx="0"/>
+    <cs:effectRef idx="0"/>
+    <cs:fontRef idx="minor">
+      <a:schemeClr val="tx1"/>
+    </cs:fontRef>
+    <cs:spPr>
+      <a:ln w="9525" cap="flat" cmpd="sng" algn="ctr">
+        <a:solidFill>
+          <a:schemeClr val="tx1">
+            <a:lumMod val="35000"/>
+            <a:lumOff val="65000"/>
+          </a:schemeClr>
+        </a:solidFill>
+        <a:round/>
+      </a:ln>
+    </cs:spPr>
+  </cs:leaderLine>
+  <cs:legend>
+    <cs:lnRef idx="0"/>
+    <cs:fillRef idx="0"/>
+    <cs:effectRef idx="0"/>
+    <cs:fontRef idx="minor">
+      <a:schemeClr val="tx1">
+        <a:lumMod val="65000"/>
+        <a:lumOff val="35000"/>
+      </a:schemeClr>
+    </cs:fontRef>
+    <cs:defRPr sz="900" kern="1200"/>
+  </cs:legend>
+  <cs:plotArea mods="allowNoFillOverride allowNoLineOverride">
+    <cs:lnRef idx="0"/>
+    <cs:fillRef idx="0"/>
+    <cs:effectRef idx="0"/>
+    <cs:fontRef idx="minor">
+      <a:schemeClr val="tx1"/>
+    </cs:fontRef>
+  </cs:plotArea>
+  <cs:plotArea3D mods="allowNoFillOverride allowNoLineOverride">
+    <cs:lnRef idx="0"/>
+    <cs:fillRef idx="0"/>
+    <cs:effectRef idx="0"/>
+    <cs:fontRef idx="minor">
+      <a:schemeClr val="tx1"/>
+    </cs:fontRef>
+  </cs:plotArea3D>
+  <cs:seriesAxis>
+    <cs:lnRef idx="0"/>
+    <cs:fillRef idx="0"/>
+    <cs:effectRef idx="0"/>
+    <cs:fontRef idx="minor">
+      <a:schemeClr val="tx1">
+        <a:lumMod val="65000"/>
+        <a:lumOff val="35000"/>
+      </a:schemeClr>
+    </cs:fontRef>
+    <cs:defRPr sz="900" kern="1200"/>
+  </cs:seriesAxis>
+  <cs:seriesLine>
+    <cs:lnRef idx="0"/>
+    <cs:fillRef idx="0"/>
+    <cs:effectRef idx="0"/>
+    <cs:fontRef idx="minor">
+      <a:schemeClr val="tx1"/>
+    </cs:fontRef>
+    <cs:spPr>
+      <a:ln w="9525" cap="flat" cmpd="sng" algn="ctr">
+        <a:solidFill>
+          <a:schemeClr val="tx1">
+            <a:lumMod val="35000"/>
+            <a:lumOff val="65000"/>
+          </a:schemeClr>
+        </a:solidFill>
+        <a:round/>
+      </a:ln>
+    </cs:spPr>
+  </cs:seriesLine>
+  <cs:title>
+    <cs:lnRef idx="0"/>
+    <cs:fillRef idx="0"/>
+    <cs:effectRef idx="0"/>
+    <cs:fontRef idx="minor">
+      <a:schemeClr val="tx1">
+        <a:lumMod val="65000"/>
+        <a:lumOff val="35000"/>
+      </a:schemeClr>
+    </cs:fontRef>
+    <cs:defRPr sz="1400" b="0" kern="1200" spc="0" baseline="0"/>
+  </cs:title>
+  <cs:trendline>
+    <cs:lnRef idx="0">
+      <cs:styleClr val="auto"/>
+    </cs:lnRef>
+    <cs:fillRef idx="0"/>
+    <cs:effectRef idx="0"/>
+    <cs:fontRef idx="minor">
+      <a:schemeClr val="tx1"/>
+    </cs:fontRef>
+    <cs:spPr>
+      <a:ln w="19050" cap="rnd">
+        <a:solidFill>
+          <a:schemeClr val="phClr"/>
+        </a:solidFill>
+        <a:prstDash val="sysDot"/>
+      </a:ln>
+    </cs:spPr>
+  </cs:trendline>
+  <cs:trendlineLabel>
+    <cs:lnRef idx="0"/>
+    <cs:fillRef idx="0"/>
+    <cs:effectRef idx="0"/>
+    <cs:fontRef idx="minor">
+      <a:schemeClr val="tx1">
+        <a:lumMod val="65000"/>
+        <a:lumOff val="35000"/>
+      </a:schemeClr>
+    </cs:fontRef>
+    <cs:defRPr sz="900" kern="1200"/>
+  </cs:trendlineLabel>
+  <cs:upBar>
+    <cs:lnRef idx="0"/>
+    <cs:fillRef idx="0"/>
+    <cs:effectRef idx="0"/>
+    <cs:fontRef idx="minor">
+      <a:schemeClr val="dk1"/>
+    </cs:fontRef>
+    <cs:spPr>
+      <a:solidFill>
+        <a:schemeClr val="lt1"/>
+      </a:solidFill>
+      <a:ln w="9525">
+        <a:solidFill>
+          <a:schemeClr val="tx1">
+            <a:lumMod val="15000"/>
+            <a:lumOff val="85000"/>
+          </a:schemeClr>
+        </a:solidFill>
+      </a:ln>
+    </cs:spPr>
+  </cs:upBar>
+  <cs:valueAxis>
+    <cs:lnRef idx="0"/>
+    <cs:fillRef idx="0"/>
+    <cs:effectRef idx="0"/>
+    <cs:fontRef idx="minor">
+      <a:schemeClr val="tx1">
+        <a:lumMod val="65000"/>
+        <a:lumOff val="35000"/>
+      </a:schemeClr>
+    </cs:fontRef>
+    <cs:defRPr sz="900" kern="1200"/>
+  </cs:valueAxis>
+  <cs:wall>
+    <cs:lnRef idx="0"/>
+    <cs:fillRef idx="0"/>
+    <cs:effectRef idx="0"/>
+    <cs:fontRef idx="minor">
+      <a:schemeClr val="tx1"/>
+    </cs:fontRef>
+    <cs:spPr>
+      <a:noFill/>
+      <a:ln>
+        <a:noFill/>
+      </a:ln>
+    </cs:spPr>
+  </cs:wall>
+</cs:chartStyle>
 </file>
 
 <file path=ppt/notesMasters/notesMaster1.xml><?xml version="1.0" encoding="utf-8"?>
@@ -2570,7 +7959,13 @@
         <p:nvGraphicFramePr>
           <p:cNvPr id="5" name="Chart 0"/>
           <p:cNvGraphicFramePr/>
-          <p:nvPr/>
+          <p:nvPr>
+            <p:extLst>
+              <p:ext uri="{D42A27DB-BD31-4B8C-83A1-F6EECF244321}">
+                <p14:modId xmlns:p14="http://schemas.microsoft.com/office/powerpoint/2010/main" val="397436877"/>
+              </p:ext>
+            </p:extLst>
+          </p:nvPr>
         </p:nvGraphicFramePr>
         <p:xfrm>
           <a:off x="914400" y="2331720"/>
@@ -2710,6 +8105,17 @@
               <a:buNone/>
             </a:pPr>
             <a:r>
+              <a:rPr lang="en-US" sz="3200" b="1" dirty="0" err="1">
+                <a:solidFill>
+                  <a:srgbClr val="1A1A2E"/>
+                </a:solidFill>
+                <a:latin typeface="Cambria" pitchFamily="34" charset="0"/>
+                <a:ea typeface="Cambria" pitchFamily="34" charset="-122"/>
+                <a:cs typeface="Cambria" pitchFamily="34" charset="-120"/>
+              </a:rPr>
+              <a:t>Limites</a:t>
+            </a:r>
+            <a:r>
               <a:rPr lang="en-US" sz="3200" b="1" dirty="0">
                 <a:solidFill>
                   <a:srgbClr val="1A1A2E"/>
@@ -2718,7 +8124,18 @@
                 <a:ea typeface="Cambria" pitchFamily="34" charset="-122"/>
                 <a:cs typeface="Cambria" pitchFamily="34" charset="-120"/>
               </a:rPr>
-              <a:t>Deux lectures, et des limites assumées</a:t>
+              <a:t> de la </a:t>
+            </a:r>
+            <a:r>
+              <a:rPr lang="en-US" sz="3200" b="1" dirty="0" err="1">
+                <a:solidFill>
+                  <a:srgbClr val="1A1A2E"/>
+                </a:solidFill>
+                <a:latin typeface="Cambria" pitchFamily="34" charset="0"/>
+                <a:ea typeface="Cambria" pitchFamily="34" charset="-122"/>
+                <a:cs typeface="Cambria" pitchFamily="34" charset="-120"/>
+              </a:rPr>
+              <a:t>prédiction</a:t>
             </a:r>
             <a:endParaRPr lang="en-US" sz="3200" dirty="0"/>
           </a:p>
@@ -3048,7 +8465,7 @@
                 <a:ea typeface="Calibri" pitchFamily="34" charset="-122"/>
                 <a:cs typeface="Calibri" pitchFamily="34" charset="-120"/>
               </a:rPr>
-              <a:t>Période raccourcie (2018–mi 2020) et facteur marché approché</a:t>
+              <a:t>Période raccourcie (2018–mi 2020)</a:t>
             </a:r>
             <a:endParaRPr lang="en-US" sz="1400" dirty="0"/>
           </a:p>
@@ -6163,75 +11580,6 @@
           </a:p>
         </p:txBody>
       </p:sp>
-      <p:sp>
-        <p:nvSpPr>
-          <p:cNvPr id="17" name="ZoneTexte 16">
-            <a:extLst>
-              <a:ext uri="{FF2B5EF4-FFF2-40B4-BE49-F238E27FC236}">
-                <a16:creationId xmlns:a16="http://schemas.microsoft.com/office/drawing/2014/main" id="{446FC47C-23D9-4F02-8FB2-604156C6BA40}"/>
-              </a:ext>
-            </a:extLst>
-          </p:cNvPr>
-          <p:cNvSpPr txBox="1"/>
-          <p:nvPr/>
-        </p:nvSpPr>
-        <p:spPr>
-          <a:xfrm>
-            <a:off x="3543074" y="3240762"/>
-            <a:ext cx="3406594" cy="369332"/>
-          </a:xfrm>
-          <a:prstGeom prst="rect">
-            <a:avLst/>
-          </a:prstGeom>
-          <a:noFill/>
-        </p:spPr>
-        <p:txBody>
-          <a:bodyPr wrap="square">
-            <a:spAutoFit/>
-          </a:bodyPr>
-          <a:lstStyle/>
-          <a:p>
-            <a:r>
-              <a:rPr lang="en-US" sz="1800" dirty="0">
-                <a:solidFill>
-                  <a:schemeClr val="bg2">
-                    <a:lumMod val="75000"/>
-                  </a:schemeClr>
-                </a:solidFill>
-                <a:latin typeface="Calibri" pitchFamily="34" charset="0"/>
-                <a:ea typeface="Calibri" pitchFamily="34" charset="-122"/>
-                <a:cs typeface="Calibri" pitchFamily="34" charset="-120"/>
-              </a:rPr>
-              <a:t>Microsoft, Goldman Sachs </a:t>
-            </a:r>
-            <a:r>
-              <a:rPr lang="en-US" sz="1800" dirty="0" err="1">
-                <a:solidFill>
-                  <a:schemeClr val="bg2">
-                    <a:lumMod val="75000"/>
-                  </a:schemeClr>
-                </a:solidFill>
-                <a:latin typeface="Calibri" pitchFamily="34" charset="0"/>
-                <a:ea typeface="Calibri" pitchFamily="34" charset="-122"/>
-                <a:cs typeface="Calibri" pitchFamily="34" charset="-120"/>
-              </a:rPr>
-              <a:t>exclues</a:t>
-            </a:r>
-            <a:r>
-              <a:rPr lang="en-US" sz="1800" dirty="0">
-                <a:solidFill>
-                  <a:srgbClr val="5B6785"/>
-                </a:solidFill>
-                <a:latin typeface="Calibri" pitchFamily="34" charset="0"/>
-                <a:ea typeface="Calibri" pitchFamily="34" charset="-122"/>
-                <a:cs typeface="Calibri" pitchFamily="34" charset="-120"/>
-              </a:rPr>
-              <a:t> </a:t>
-            </a:r>
-            <a:endParaRPr lang="fr-FR" dirty="0"/>
-          </a:p>
-        </p:txBody>
-      </p:sp>
     </p:spTree>
   </p:cSld>
   <p:clrMapOvr>
@@ -6337,351 +11685,6 @@
       </p:sp>
       <p:sp>
         <p:nvSpPr>
-          <p:cNvPr id="4" name="Text 2"/>
-          <p:cNvSpPr txBox="1"/>
-          <p:nvPr/>
-        </p:nvSpPr>
-        <p:spPr>
-          <a:xfrm>
-            <a:off x="514574" y="1661431"/>
-            <a:ext cx="6065520" cy="1897557"/>
-          </a:xfrm>
-          <a:prstGeom prst="rect">
-            <a:avLst/>
-          </a:prstGeom>
-          <a:noFill/>
-          <a:ln/>
-        </p:spPr>
-        <p:txBody>
-          <a:bodyPr wrap="square" rtlCol="0" anchor="t"/>
-          <a:lstStyle/>
-          <a:p>
-            <a:pPr marL="0" indent="0">
-              <a:lnSpc>
-                <a:spcPts val="2400"/>
-              </a:lnSpc>
-              <a:buNone/>
-            </a:pPr>
-            <a:r>
-              <a:rPr lang="en-US" sz="1600" dirty="0">
-                <a:solidFill>
-                  <a:srgbClr val="1A1A2E"/>
-                </a:solidFill>
-                <a:latin typeface="Calibri" pitchFamily="34" charset="0"/>
-                <a:ea typeface="Calibri" pitchFamily="34" charset="-122"/>
-                <a:cs typeface="Calibri" pitchFamily="34" charset="-120"/>
-              </a:rPr>
-              <a:t>En traçant le cours de </a:t>
-            </a:r>
-            <a:r>
-              <a:rPr lang="en-US" sz="1600" dirty="0" err="1">
-                <a:solidFill>
-                  <a:srgbClr val="1A1A2E"/>
-                </a:solidFill>
-                <a:latin typeface="Calibri" pitchFamily="34" charset="0"/>
-                <a:ea typeface="Calibri" pitchFamily="34" charset="-122"/>
-                <a:cs typeface="Calibri" pitchFamily="34" charset="-120"/>
-              </a:rPr>
-              <a:t>Tesla,saut</a:t>
-            </a:r>
-            <a:r>
-              <a:rPr lang="en-US" sz="1600" dirty="0">
-                <a:solidFill>
-                  <a:srgbClr val="1A1A2E"/>
-                </a:solidFill>
-                <a:latin typeface="Calibri" pitchFamily="34" charset="0"/>
-                <a:ea typeface="Calibri" pitchFamily="34" charset="-122"/>
-                <a:cs typeface="Calibri" pitchFamily="34" charset="-120"/>
-              </a:rPr>
-              <a:t> de prix irréaliste vers août 2020.</a:t>
-            </a:r>
-            <a:endParaRPr lang="en-US" sz="1600" dirty="0"/>
-          </a:p>
-          <a:p>
-            <a:pPr marL="0" indent="0">
-              <a:lnSpc>
-                <a:spcPts val="2400"/>
-              </a:lnSpc>
-              <a:buNone/>
-            </a:pPr>
-            <a:r>
-              <a:rPr lang="en-US" sz="1600" dirty="0">
-                <a:solidFill>
-                  <a:srgbClr val="1A1A2E"/>
-                </a:solidFill>
-                <a:latin typeface="Calibri" pitchFamily="34" charset="0"/>
-                <a:ea typeface="Calibri" pitchFamily="34" charset="-122"/>
-                <a:cs typeface="Calibri" pitchFamily="34" charset="-120"/>
-              </a:rPr>
-              <a:t>Cause : les </a:t>
-            </a:r>
-            <a:r>
-              <a:rPr lang="en-US" sz="1600" dirty="0" err="1">
-                <a:solidFill>
-                  <a:srgbClr val="1A1A2E"/>
-                </a:solidFill>
-                <a:latin typeface="Calibri" pitchFamily="34" charset="0"/>
-                <a:ea typeface="Calibri" pitchFamily="34" charset="-122"/>
-                <a:cs typeface="Calibri" pitchFamily="34" charset="-120"/>
-              </a:rPr>
-              <a:t>colonnes</a:t>
-            </a:r>
-            <a:r>
-              <a:rPr lang="en-US" sz="1600" dirty="0">
-                <a:solidFill>
-                  <a:srgbClr val="1A1A2E"/>
-                </a:solidFill>
-                <a:latin typeface="Calibri" pitchFamily="34" charset="0"/>
-                <a:ea typeface="Calibri" pitchFamily="34" charset="-122"/>
-                <a:cs typeface="Calibri" pitchFamily="34" charset="-120"/>
-              </a:rPr>
-              <a:t> close et </a:t>
-            </a:r>
-            <a:r>
-              <a:rPr lang="en-US" sz="1600" dirty="0" err="1">
-                <a:solidFill>
-                  <a:srgbClr val="1A1A2E"/>
-                </a:solidFill>
-                <a:latin typeface="Calibri" pitchFamily="34" charset="0"/>
-                <a:ea typeface="Calibri" pitchFamily="34" charset="-122"/>
-                <a:cs typeface="Calibri" pitchFamily="34" charset="-120"/>
-              </a:rPr>
-              <a:t>adj_close</a:t>
-            </a:r>
-            <a:r>
-              <a:rPr lang="en-US" sz="1600" dirty="0">
-                <a:solidFill>
-                  <a:srgbClr val="1A1A2E"/>
-                </a:solidFill>
-                <a:latin typeface="Calibri" pitchFamily="34" charset="0"/>
-                <a:ea typeface="Calibri" pitchFamily="34" charset="-122"/>
-                <a:cs typeface="Calibri" pitchFamily="34" charset="-120"/>
-              </a:rPr>
-              <a:t> de FNSPID </a:t>
-            </a:r>
-            <a:r>
-              <a:rPr lang="en-US" sz="1600" dirty="0" err="1">
-                <a:solidFill>
-                  <a:srgbClr val="1A1A2E"/>
-                </a:solidFill>
-                <a:latin typeface="Calibri" pitchFamily="34" charset="0"/>
-                <a:ea typeface="Calibri" pitchFamily="34" charset="-122"/>
-                <a:cs typeface="Calibri" pitchFamily="34" charset="-120"/>
-              </a:rPr>
-              <a:t>sont</a:t>
-            </a:r>
-            <a:r>
-              <a:rPr lang="en-US" sz="1600" dirty="0">
-                <a:solidFill>
-                  <a:srgbClr val="1A1A2E"/>
-                </a:solidFill>
-                <a:latin typeface="Calibri" pitchFamily="34" charset="0"/>
-                <a:ea typeface="Calibri" pitchFamily="34" charset="-122"/>
-                <a:cs typeface="Calibri" pitchFamily="34" charset="-120"/>
-              </a:rPr>
-              <a:t> </a:t>
-            </a:r>
-            <a:r>
-              <a:rPr lang="en-US" sz="1600" dirty="0" err="1">
-                <a:solidFill>
-                  <a:srgbClr val="1A1A2E"/>
-                </a:solidFill>
-                <a:latin typeface="Calibri" pitchFamily="34" charset="0"/>
-                <a:ea typeface="Calibri" pitchFamily="34" charset="-122"/>
-                <a:cs typeface="Calibri" pitchFamily="34" charset="-120"/>
-              </a:rPr>
-              <a:t>identiques</a:t>
-            </a:r>
-            <a:r>
-              <a:rPr lang="en-US" sz="1600" dirty="0">
-                <a:solidFill>
-                  <a:srgbClr val="1A1A2E"/>
-                </a:solidFill>
-                <a:latin typeface="Calibri" pitchFamily="34" charset="0"/>
-                <a:ea typeface="Calibri" pitchFamily="34" charset="-122"/>
-                <a:cs typeface="Calibri" pitchFamily="34" charset="-120"/>
-              </a:rPr>
-              <a:t> — Tesla </a:t>
-            </a:r>
-            <a:r>
-              <a:rPr lang="en-US" sz="1600" dirty="0" err="1">
-                <a:solidFill>
-                  <a:srgbClr val="1A1A2E"/>
-                </a:solidFill>
-                <a:latin typeface="Calibri" pitchFamily="34" charset="0"/>
-                <a:ea typeface="Calibri" pitchFamily="34" charset="-122"/>
-                <a:cs typeface="Calibri" pitchFamily="34" charset="-120"/>
-              </a:rPr>
-              <a:t>ayant</a:t>
-            </a:r>
-            <a:r>
-              <a:rPr lang="en-US" sz="1600" dirty="0">
-                <a:solidFill>
-                  <a:srgbClr val="1A1A2E"/>
-                </a:solidFill>
-                <a:latin typeface="Calibri" pitchFamily="34" charset="0"/>
-                <a:ea typeface="Calibri" pitchFamily="34" charset="-122"/>
-                <a:cs typeface="Calibri" pitchFamily="34" charset="-120"/>
-              </a:rPr>
-              <a:t> </a:t>
-            </a:r>
-            <a:r>
-              <a:rPr lang="en-US" sz="1600" dirty="0" err="1">
-                <a:solidFill>
-                  <a:srgbClr val="1A1A2E"/>
-                </a:solidFill>
-                <a:latin typeface="Calibri" pitchFamily="34" charset="0"/>
-                <a:ea typeface="Calibri" pitchFamily="34" charset="-122"/>
-                <a:cs typeface="Calibri" pitchFamily="34" charset="-120"/>
-              </a:rPr>
-              <a:t>splitté</a:t>
-            </a:r>
-            <a:r>
-              <a:rPr lang="en-US" sz="1600" dirty="0">
-                <a:solidFill>
-                  <a:srgbClr val="1A1A2E"/>
-                </a:solidFill>
-                <a:latin typeface="Calibri" pitchFamily="34" charset="0"/>
-                <a:ea typeface="Calibri" pitchFamily="34" charset="-122"/>
-                <a:cs typeface="Calibri" pitchFamily="34" charset="-120"/>
-              </a:rPr>
-              <a:t> (2020), </a:t>
-            </a:r>
-            <a:r>
-              <a:rPr lang="en-US" sz="1600" dirty="0" err="1">
-                <a:solidFill>
-                  <a:srgbClr val="1A1A2E"/>
-                </a:solidFill>
-                <a:latin typeface="Calibri" pitchFamily="34" charset="0"/>
-                <a:ea typeface="Calibri" pitchFamily="34" charset="-122"/>
-                <a:cs typeface="Calibri" pitchFamily="34" charset="-120"/>
-              </a:rPr>
-              <a:t>aucune</a:t>
-            </a:r>
-            <a:r>
-              <a:rPr lang="en-US" sz="1600" dirty="0">
-                <a:solidFill>
-                  <a:srgbClr val="1A1A2E"/>
-                </a:solidFill>
-                <a:latin typeface="Calibri" pitchFamily="34" charset="0"/>
-                <a:ea typeface="Calibri" pitchFamily="34" charset="-122"/>
-                <a:cs typeface="Calibri" pitchFamily="34" charset="-120"/>
-              </a:rPr>
-              <a:t> des deux </a:t>
-            </a:r>
-            <a:r>
-              <a:rPr lang="en-US" sz="1600" dirty="0" err="1">
-                <a:solidFill>
-                  <a:srgbClr val="1A1A2E"/>
-                </a:solidFill>
-                <a:latin typeface="Calibri" pitchFamily="34" charset="0"/>
-                <a:ea typeface="Calibri" pitchFamily="34" charset="-122"/>
-                <a:cs typeface="Calibri" pitchFamily="34" charset="-120"/>
-              </a:rPr>
-              <a:t>n'est</a:t>
-            </a:r>
-            <a:r>
-              <a:rPr lang="en-US" sz="1600" dirty="0">
-                <a:solidFill>
-                  <a:srgbClr val="1A1A2E"/>
-                </a:solidFill>
-                <a:latin typeface="Calibri" pitchFamily="34" charset="0"/>
-                <a:ea typeface="Calibri" pitchFamily="34" charset="-122"/>
-                <a:cs typeface="Calibri" pitchFamily="34" charset="-120"/>
-              </a:rPr>
-              <a:t> </a:t>
-            </a:r>
-            <a:r>
-              <a:rPr lang="en-US" sz="1600" dirty="0" err="1">
-                <a:solidFill>
-                  <a:srgbClr val="1A1A2E"/>
-                </a:solidFill>
-                <a:latin typeface="Calibri" pitchFamily="34" charset="0"/>
-                <a:ea typeface="Calibri" pitchFamily="34" charset="-122"/>
-                <a:cs typeface="Calibri" pitchFamily="34" charset="-120"/>
-              </a:rPr>
-              <a:t>réellement</a:t>
-            </a:r>
-            <a:r>
-              <a:rPr lang="en-US" sz="1600" dirty="0">
-                <a:solidFill>
-                  <a:srgbClr val="1A1A2E"/>
-                </a:solidFill>
-                <a:latin typeface="Calibri" pitchFamily="34" charset="0"/>
-                <a:ea typeface="Calibri" pitchFamily="34" charset="-122"/>
-                <a:cs typeface="Calibri" pitchFamily="34" charset="-120"/>
-              </a:rPr>
-              <a:t> </a:t>
-            </a:r>
-            <a:r>
-              <a:rPr lang="en-US" sz="1600" dirty="0" err="1">
-                <a:solidFill>
-                  <a:srgbClr val="1A1A2E"/>
-                </a:solidFill>
-                <a:latin typeface="Calibri" pitchFamily="34" charset="0"/>
-                <a:ea typeface="Calibri" pitchFamily="34" charset="-122"/>
-                <a:cs typeface="Calibri" pitchFamily="34" charset="-120"/>
-              </a:rPr>
-              <a:t>ajustée</a:t>
-            </a:r>
-            <a:r>
-              <a:rPr lang="en-US" sz="1600" dirty="0">
-                <a:solidFill>
-                  <a:srgbClr val="1A1A2E"/>
-                </a:solidFill>
-                <a:latin typeface="Calibri" pitchFamily="34" charset="0"/>
-                <a:ea typeface="Calibri" pitchFamily="34" charset="-122"/>
-                <a:cs typeface="Calibri" pitchFamily="34" charset="-120"/>
-              </a:rPr>
-              <a:t>.</a:t>
-            </a:r>
-            <a:endParaRPr lang="en-US" sz="1600" dirty="0"/>
-          </a:p>
-          <a:p>
-            <a:pPr marL="0" indent="0">
-              <a:lnSpc>
-                <a:spcPts val="2400"/>
-              </a:lnSpc>
-              <a:buNone/>
-            </a:pPr>
-            <a:r>
-              <a:rPr lang="en-US" sz="1600" dirty="0">
-                <a:solidFill>
-                  <a:srgbClr val="1A1A2E"/>
-                </a:solidFill>
-                <a:latin typeface="Calibri" pitchFamily="34" charset="0"/>
-                <a:ea typeface="Calibri" pitchFamily="34" charset="-122"/>
-                <a:cs typeface="Calibri" pitchFamily="34" charset="-120"/>
-              </a:rPr>
-              <a:t>Correction : prix des 48 entreprises retéléchargés directement depuis Yahoo Finance (correctement </a:t>
-            </a:r>
-            <a:r>
-              <a:rPr lang="en-US" sz="1600" dirty="0" err="1">
-                <a:solidFill>
-                  <a:srgbClr val="1A1A2E"/>
-                </a:solidFill>
-                <a:latin typeface="Calibri" pitchFamily="34" charset="0"/>
-                <a:ea typeface="Calibri" pitchFamily="34" charset="-122"/>
-                <a:cs typeface="Calibri" pitchFamily="34" charset="-120"/>
-              </a:rPr>
-              <a:t>ajustés</a:t>
-            </a:r>
-            <a:r>
-              <a:rPr lang="en-US" sz="1600" dirty="0">
-                <a:solidFill>
-                  <a:srgbClr val="1A1A2E"/>
-                </a:solidFill>
-                <a:latin typeface="Calibri" pitchFamily="34" charset="0"/>
-                <a:ea typeface="Calibri" pitchFamily="34" charset="-122"/>
-                <a:cs typeface="Calibri" pitchFamily="34" charset="-120"/>
-              </a:rPr>
-              <a:t>).</a:t>
-            </a:r>
-          </a:p>
-        </p:txBody>
-      </p:sp>
-      <p:sp>
-        <p:nvSpPr>
           <p:cNvPr id="8" name="Text 6"/>
           <p:cNvSpPr/>
           <p:nvPr/>
@@ -6719,36 +11722,6 @@
           </a:p>
         </p:txBody>
       </p:sp>
-      <p:pic>
-        <p:nvPicPr>
-          <p:cNvPr id="13" name="Image 12">
-            <a:extLst>
-              <a:ext uri="{FF2B5EF4-FFF2-40B4-BE49-F238E27FC236}">
-                <a16:creationId xmlns:a16="http://schemas.microsoft.com/office/drawing/2014/main" id="{CA8ADDFD-6435-40B8-BF5A-577BB1ACE502}"/>
-              </a:ext>
-            </a:extLst>
-          </p:cNvPr>
-          <p:cNvPicPr>
-            <a:picLocks noChangeAspect="1"/>
-          </p:cNvPicPr>
-          <p:nvPr/>
-        </p:nvPicPr>
-        <p:blipFill>
-          <a:blip r:embed="rId3"/>
-          <a:stretch>
-            <a:fillRect/>
-          </a:stretch>
-        </p:blipFill>
-        <p:spPr>
-          <a:xfrm>
-            <a:off x="514574" y="3544645"/>
-            <a:ext cx="5815376" cy="2473091"/>
-          </a:xfrm>
-          <a:prstGeom prst="rect">
-            <a:avLst/>
-          </a:prstGeom>
-        </p:spPr>
-      </p:pic>
       <p:sp>
         <p:nvSpPr>
           <p:cNvPr id="14" name="Ellipse 13">
@@ -6763,7 +11736,7 @@
         </p:nvSpPr>
         <p:spPr>
           <a:xfrm>
-            <a:off x="4807176" y="3901468"/>
+            <a:off x="5309201" y="2478741"/>
             <a:ext cx="923365" cy="858819"/>
           </a:xfrm>
           <a:prstGeom prst="ellipse">
@@ -6816,7 +11789,7 @@
           <p:nvPr/>
         </p:nvPicPr>
         <p:blipFill>
-          <a:blip r:embed="rId4">
+          <a:blip r:embed="rId3">
             <a:extLst>
               <a:ext uri="{28A0092B-C50C-407E-A947-70E740481C1C}">
                 <a14:useLocalDpi xmlns:a14="http://schemas.microsoft.com/office/drawing/2010/main" val="0"/>
@@ -6830,7 +11803,7 @@
         </p:blipFill>
         <p:spPr bwMode="auto">
           <a:xfrm>
-            <a:off x="7045347" y="3485534"/>
+            <a:off x="7045347" y="2210781"/>
             <a:ext cx="4323388" cy="2549506"/>
           </a:xfrm>
           <a:prstGeom prst="rect">
@@ -6848,6 +11821,36 @@
           </a:extLst>
         </p:spPr>
       </p:pic>
+      <p:graphicFrame>
+        <p:nvGraphicFramePr>
+          <p:cNvPr id="16" name="Graphique 15">
+            <a:extLst>
+              <a:ext uri="{FF2B5EF4-FFF2-40B4-BE49-F238E27FC236}">
+                <a16:creationId xmlns:a16="http://schemas.microsoft.com/office/drawing/2014/main" id="{4518210B-82FD-4442-82F0-E16123496ABC}"/>
+              </a:ext>
+            </a:extLst>
+          </p:cNvPr>
+          <p:cNvGraphicFramePr>
+            <a:graphicFrameLocks/>
+          </p:cNvGraphicFramePr>
+          <p:nvPr>
+            <p:extLst>
+              <p:ext uri="{D42A27DB-BD31-4B8C-83A1-F6EECF244321}">
+                <p14:modId xmlns:p14="http://schemas.microsoft.com/office/powerpoint/2010/main" val="3649123074"/>
+              </p:ext>
+            </p:extLst>
+          </p:nvPr>
+        </p:nvGraphicFramePr>
+        <p:xfrm>
+          <a:off x="432099" y="1965960"/>
+          <a:ext cx="6461760" cy="2743200"/>
+        </p:xfrm>
+        <a:graphic>
+          <a:graphicData uri="http://schemas.openxmlformats.org/drawingml/2006/chart">
+            <c:chart xmlns:c="http://schemas.openxmlformats.org/drawingml/2006/chart" xmlns:r="http://schemas.openxmlformats.org/officeDocument/2006/relationships" r:id="rId4"/>
+          </a:graphicData>
+        </a:graphic>
+      </p:graphicFrame>
     </p:spTree>
   </p:cSld>
   <p:clrMapOvr>
@@ -7261,7 +12264,7 @@
                 <a:ea typeface="Calibri" pitchFamily="34" charset="-122"/>
                 <a:cs typeface="Calibri" pitchFamily="34" charset="-120"/>
               </a:rPr>
-              <a:t>APT (Ross, 1976) plutôt que CAPM : plusieurs facteurs en même temps, pour isoler l'effet du sentiment de celui du marché et de la conjoncture.</a:t>
+              <a:t>APT : plusieurs facteurs en même temps, pour isoler l'effet du sentiment de celui du marché et de la conjoncture.</a:t>
             </a:r>
             <a:endParaRPr lang="en-US" sz="1500" dirty="0"/>
           </a:p>
